--- a/진로포트폴리오_조예진.pptx
+++ b/진로포트폴리오_조예진.pptx
@@ -13,14 +13,15 @@
     <p:sldId id="261" r:id="rId12"/>
     <p:sldId id="262" r:id="rId13"/>
     <p:sldId id="263" r:id="rId14"/>
+    <p:sldId id="264" r:id="rId15"/>
   </p:sldIdLst>
   <p:sldSz cx="12191695" cy="6858000" type="screen4x3"/>
   <p:notesSz cx="6858000" cy="9144000"/>
   <p:embeddedFontLst>
     <p:embeddedFont>
       <p:font typeface="Pretendard"/>
-      <p:regular r:id="rId15"/>
-      <p:bold r:id="rId16"/>
+      <p:regular r:id="rId16"/>
+      <p:bold r:id="rId17"/>
     </p:embeddedFont>
   </p:embeddedFontLst>
   <p:defaultTextStyle>
@@ -7359,7 +7360,7 @@
                 </a:solidFill>
                 <a:latin typeface="Pretendard"/>
               </a:rPr>
-              <a:t>HIGHLIGHTS  ·  활동에서 배운 것</a:t>
+              <a:t>PROOF  ·  활동 인증</a:t>
             </a:r>
           </a:p>
         </p:txBody>
@@ -7394,7 +7395,7 @@
                 </a:solidFill>
                 <a:latin typeface="Pretendard"/>
               </a:rPr>
-              <a:t>핵심 활동 심화</a:t>
+              <a:t>활동 현장 &amp; 증빙</a:t>
             </a:r>
           </a:p>
         </p:txBody>
@@ -7460,8 +7461,8 @@
         </p:nvSpPr>
         <p:spPr>
           <a:xfrm>
-            <a:off x="548640" y="1508760"/>
-            <a:ext cx="11109960" cy="1417320"/>
+            <a:off x="548640" y="1417320"/>
+            <a:ext cx="3611880" cy="4892040"/>
           </a:xfrm>
           <a:prstGeom prst="roundRect">
             <a:avLst/>
@@ -7511,206 +7512,10 @@
         </p:nvSpPr>
         <p:spPr>
           <a:xfrm>
-            <a:off x="548640" y="1508760"/>
-            <a:ext cx="201168" cy="1417320"/>
+            <a:off x="751840" y="1620520"/>
+            <a:ext cx="3205480" cy="3251200"/>
           </a:xfrm>
           <a:prstGeom prst="rect">
-            <a:avLst/>
-          </a:prstGeom>
-          <a:solidFill>
-            <a:srgbClr val="C6F016"/>
-          </a:solidFill>
-          <a:ln>
-            <a:noFill/>
-          </a:ln>
-          <a:effectLst/>
-        </p:spPr>
-        <p:style>
-          <a:lnRef idx="1">
-            <a:schemeClr val="accent1"/>
-          </a:lnRef>
-          <a:fillRef idx="3">
-            <a:schemeClr val="accent1"/>
-          </a:fillRef>
-          <a:effectRef idx="2">
-            <a:schemeClr val="accent1"/>
-          </a:effectRef>
-          <a:fontRef idx="minor">
-            <a:schemeClr val="lt1"/>
-          </a:fontRef>
-        </p:style>
-        <p:txBody>
-          <a:bodyPr rtlCol="0" anchor="ctr"/>
-          <a:lstStyle/>
-          <a:p>
-            <a:pPr algn="ctr"/>
-          </a:p>
-        </p:txBody>
-      </p:sp>
-      <p:sp>
-        <p:nvSpPr>
-          <p:cNvPr id="9" name="TextBox 8"/>
-          <p:cNvSpPr txBox="1"/>
-          <p:nvPr/>
-        </p:nvSpPr>
-        <p:spPr>
-          <a:xfrm>
-            <a:off x="960120" y="1673352"/>
-            <a:ext cx="4846320" cy="1097280"/>
-          </a:xfrm>
-          <a:prstGeom prst="rect">
-            <a:avLst/>
-          </a:prstGeom>
-          <a:noFill/>
-        </p:spPr>
-        <p:txBody>
-          <a:bodyPr wrap="square" anchor="t" lIns="25400" rIns="25400" tIns="25400" bIns="25400">
-            <a:spAutoFit/>
-          </a:bodyPr>
-          <a:lstStyle/>
-          <a:p>
-            <a:pPr algn="l"/>
-            <a:r>
-              <a:rPr sz="1600" b="1">
-                <a:solidFill>
-                  <a:srgbClr val="0F2E4F"/>
-                </a:solidFill>
-                <a:latin typeface="Pretendard"/>
-              </a:rPr>
-              <a:t>서포크레딧 · 주택금융 서포터즈</a:t>
-            </a:r>
-          </a:p>
-          <a:p>
-            <a:pPr algn="l">
-              <a:spcBef>
-                <a:spcPts val="400"/>
-              </a:spcBef>
-            </a:pPr>
-            <a:r>
-              <a:rPr sz="1250" b="0">
-                <a:solidFill>
-                  <a:srgbClr val="5B6B7B"/>
-                </a:solidFill>
-                <a:latin typeface="Pretendard"/>
-              </a:rPr>
-              <a:t>금융 콘텐츠 기획 · 제작, 홍보</a:t>
-            </a:r>
-          </a:p>
-        </p:txBody>
-      </p:sp>
-      <p:sp>
-        <p:nvSpPr>
-          <p:cNvPr id="10" name="Rounded Rectangle 9"/>
-          <p:cNvSpPr/>
-          <p:nvPr/>
-        </p:nvSpPr>
-        <p:spPr>
-          <a:xfrm>
-            <a:off x="6035040" y="1737360"/>
-            <a:ext cx="5486400" cy="960120"/>
-          </a:xfrm>
-          <a:prstGeom prst="roundRect">
-            <a:avLst/>
-          </a:prstGeom>
-          <a:solidFill>
-            <a:srgbClr val="F4F7FB"/>
-          </a:solidFill>
-          <a:ln w="12700">
-            <a:solidFill>
-              <a:srgbClr val="E2E8F0"/>
-            </a:solidFill>
-          </a:ln>
-          <a:effectLst/>
-        </p:spPr>
-        <p:style>
-          <a:lnRef idx="1">
-            <a:schemeClr val="accent1"/>
-          </a:lnRef>
-          <a:fillRef idx="3">
-            <a:schemeClr val="accent1"/>
-          </a:fillRef>
-          <a:effectRef idx="2">
-            <a:schemeClr val="accent1"/>
-          </a:effectRef>
-          <a:fontRef idx="minor">
-            <a:schemeClr val="lt1"/>
-          </a:fontRef>
-        </p:style>
-        <p:txBody>
-          <a:bodyPr rtlCol="0" anchor="ctr"/>
-          <a:lstStyle/>
-          <a:p>
-            <a:pPr algn="ctr"/>
-          </a:p>
-        </p:txBody>
-      </p:sp>
-      <p:sp>
-        <p:nvSpPr>
-          <p:cNvPr id="11" name="TextBox 10"/>
-          <p:cNvSpPr txBox="1"/>
-          <p:nvPr/>
-        </p:nvSpPr>
-        <p:spPr>
-          <a:xfrm>
-            <a:off x="6217920" y="1810512"/>
-            <a:ext cx="5212080" cy="822960"/>
-          </a:xfrm>
-          <a:prstGeom prst="rect">
-            <a:avLst/>
-          </a:prstGeom>
-          <a:noFill/>
-        </p:spPr>
-        <p:txBody>
-          <a:bodyPr wrap="square" anchor="t" lIns="25400" rIns="25400" tIns="25400" bIns="25400">
-            <a:spAutoFit/>
-          </a:bodyPr>
-          <a:lstStyle/>
-          <a:p>
-            <a:pPr algn="l"/>
-            <a:r>
-              <a:rPr sz="1100" b="1">
-                <a:solidFill>
-                  <a:srgbClr val="7E9908"/>
-                </a:solidFill>
-                <a:latin typeface="Pretendard"/>
-              </a:rPr>
-              <a:t>배운 점</a:t>
-            </a:r>
-          </a:p>
-          <a:p>
-            <a:pPr algn="l">
-              <a:lnSpc>
-                <a:spcPct val="112000"/>
-              </a:lnSpc>
-              <a:spcBef>
-                <a:spcPts val="300"/>
-              </a:spcBef>
-            </a:pPr>
-            <a:r>
-              <a:rPr sz="1250" b="1">
-                <a:solidFill>
-                  <a:srgbClr val="1E2933"/>
-                </a:solidFill>
-                <a:latin typeface="Pretendard"/>
-              </a:rPr>
-              <a:t>어려운 내용을 쉽게 전달하는 경험을 쌓으며
-금융 분야에 대한 관심이 커짐</a:t>
-            </a:r>
-          </a:p>
-        </p:txBody>
-      </p:sp>
-      <p:sp>
-        <p:nvSpPr>
-          <p:cNvPr id="12" name="Rounded Rectangle 11"/>
-          <p:cNvSpPr/>
-          <p:nvPr/>
-        </p:nvSpPr>
-        <p:spPr>
-          <a:xfrm>
-            <a:off x="548640" y="3081528"/>
-            <a:ext cx="11109960" cy="1417320"/>
-          </a:xfrm>
-          <a:prstGeom prst="roundRect">
             <a:avLst/>
           </a:prstGeom>
           <a:solidFill>
@@ -7750,25 +7555,49 @@
           </a:p>
         </p:txBody>
       </p:sp>
-      <p:sp>
-        <p:nvSpPr>
-          <p:cNvPr id="13" name="Rectangle 12"/>
+      <p:pic>
+        <p:nvPicPr>
+          <p:cNvPr id="9" name="Picture 8" descr="booth.jpg"/>
+          <p:cNvPicPr>
+            <a:picLocks noChangeAspect="1"/>
+          </p:cNvPicPr>
+          <p:nvPr/>
+        </p:nvPicPr>
+        <p:blipFill>
+          <a:blip r:embed="rId2"/>
+          <a:stretch>
+            <a:fillRect/>
+          </a:stretch>
+        </p:blipFill>
+        <p:spPr>
+          <a:xfrm>
+            <a:off x="777240" y="1645920"/>
+            <a:ext cx="3154680" cy="3200400"/>
+          </a:xfrm>
+          <a:prstGeom prst="rect">
+            <a:avLst/>
+          </a:prstGeom>
+        </p:spPr>
+      </p:pic>
+      <p:sp>
+        <p:nvSpPr>
+          <p:cNvPr id="10" name="Rectangle 9"/>
           <p:cNvSpPr/>
           <p:nvPr/>
         </p:nvSpPr>
         <p:spPr>
           <a:xfrm>
-            <a:off x="548640" y="3081528"/>
-            <a:ext cx="201168" cy="1417320"/>
+            <a:off x="777240" y="1645920"/>
+            <a:ext cx="3154680" cy="3200400"/>
           </a:xfrm>
           <a:prstGeom prst="rect">
             <a:avLst/>
           </a:prstGeom>
-          <a:solidFill>
-            <a:srgbClr val="E8B44A"/>
-          </a:solidFill>
-          <a:ln>
-            <a:noFill/>
+          <a:noFill/>
+          <a:ln w="31750">
+            <a:solidFill>
+              <a:srgbClr val="C6F016"/>
+            </a:solidFill>
           </a:ln>
           <a:effectLst/>
         </p:spPr>
@@ -7796,14 +7625,14 @@
       </p:sp>
       <p:sp>
         <p:nvSpPr>
-          <p:cNvPr id="14" name="TextBox 13"/>
+          <p:cNvPr id="11" name="TextBox 10"/>
           <p:cNvSpPr txBox="1"/>
           <p:nvPr/>
         </p:nvSpPr>
         <p:spPr>
           <a:xfrm>
-            <a:off x="960120" y="3246120"/>
-            <a:ext cx="4846320" cy="1097280"/>
+            <a:off x="777240" y="4965192"/>
+            <a:ext cx="3154680" cy="1188720"/>
           </a:xfrm>
           <a:prstGeom prst="rect">
             <a:avLst/>
@@ -7818,144 +7647,65 @@
           <a:p>
             <a:pPr algn="l"/>
             <a:r>
-              <a:rPr sz="1600" b="1">
+              <a:rPr sz="1450" b="1">
                 <a:solidFill>
                   <a:srgbClr val="0F2E4F"/>
                 </a:solidFill>
                 <a:latin typeface="Pretendard"/>
               </a:rPr>
-              <a:t>군인자녀 · 사회리더 멘토링</a:t>
-            </a:r>
-          </a:p>
-          <a:p>
-            <a:pPr algn="l">
-              <a:spcBef>
-                <a:spcPts val="400"/>
-              </a:spcBef>
-            </a:pPr>
-            <a:r>
-              <a:rPr sz="1250" b="0">
-                <a:solidFill>
-                  <a:srgbClr val="5B6B7B"/>
-                </a:solidFill>
-                <a:latin typeface="Pretendard"/>
-              </a:rPr>
-              <a:t>장기 멘토링 · 멘티 경험 (각 10개월)</a:t>
-            </a:r>
-          </a:p>
-        </p:txBody>
-      </p:sp>
-      <p:sp>
-        <p:nvSpPr>
-          <p:cNvPr id="15" name="Rounded Rectangle 14"/>
-          <p:cNvSpPr/>
-          <p:nvPr/>
-        </p:nvSpPr>
-        <p:spPr>
-          <a:xfrm>
-            <a:off x="6035040" y="3310128"/>
-            <a:ext cx="5486400" cy="960120"/>
-          </a:xfrm>
-          <a:prstGeom prst="roundRect">
-            <a:avLst/>
-          </a:prstGeom>
-          <a:solidFill>
-            <a:srgbClr val="F4F7FB"/>
-          </a:solidFill>
-          <a:ln w="12700">
-            <a:solidFill>
-              <a:srgbClr val="E2E8F0"/>
-            </a:solidFill>
-          </a:ln>
-          <a:effectLst/>
-        </p:spPr>
-        <p:style>
-          <a:lnRef idx="1">
-            <a:schemeClr val="accent1"/>
-          </a:lnRef>
-          <a:fillRef idx="3">
-            <a:schemeClr val="accent1"/>
-          </a:fillRef>
-          <a:effectRef idx="2">
-            <a:schemeClr val="accent1"/>
-          </a:effectRef>
-          <a:fontRef idx="minor">
-            <a:schemeClr val="lt1"/>
-          </a:fontRef>
-        </p:style>
-        <p:txBody>
-          <a:bodyPr rtlCol="0" anchor="ctr"/>
-          <a:lstStyle/>
-          <a:p>
-            <a:pPr algn="ctr"/>
-          </a:p>
-        </p:txBody>
-      </p:sp>
-      <p:sp>
-        <p:nvSpPr>
-          <p:cNvPr id="16" name="TextBox 15"/>
-          <p:cNvSpPr txBox="1"/>
-          <p:nvPr/>
-        </p:nvSpPr>
-        <p:spPr>
-          <a:xfrm>
-            <a:off x="6217920" y="3383280"/>
-            <a:ext cx="5212080" cy="822960"/>
-          </a:xfrm>
-          <a:prstGeom prst="rect">
-            <a:avLst/>
-          </a:prstGeom>
-          <a:noFill/>
-        </p:spPr>
-        <p:txBody>
-          <a:bodyPr wrap="square" anchor="t" lIns="25400" rIns="25400" tIns="25400" bIns="25400">
-            <a:spAutoFit/>
-          </a:bodyPr>
-          <a:lstStyle/>
-          <a:p>
-            <a:pPr algn="l"/>
-            <a:r>
-              <a:rPr sz="1100" b="1">
-                <a:solidFill>
-                  <a:srgbClr val="7E9908"/>
-                </a:solidFill>
-                <a:latin typeface="Pretendard"/>
-              </a:rPr>
-              <a:t>배운 점</a:t>
+              <a:t>여신금융협회 서포크레딧</a:t>
             </a:r>
           </a:p>
           <a:p>
             <a:pPr algn="l">
               <a:lnSpc>
-                <a:spcPct val="112000"/>
+                <a:spcPct val="110000"/>
               </a:lnSpc>
               <a:spcBef>
                 <a:spcPts val="300"/>
               </a:spcBef>
             </a:pPr>
             <a:r>
-              <a:rPr sz="1250" b="1">
-                <a:solidFill>
-                  <a:srgbClr val="1E2933"/>
-                </a:solidFill>
-                <a:latin typeface="Pretendard"/>
-              </a:rPr>
-              <a:t>꾸준히 관계를 이어가는 책임감과
-경영·진로에 대한 시야를 넓힘</a:t>
-            </a:r>
-          </a:p>
-        </p:txBody>
-      </p:sp>
-      <p:sp>
-        <p:nvSpPr>
-          <p:cNvPr id="17" name="Rounded Rectangle 16"/>
+              <a:rPr sz="1150" b="1">
+                <a:solidFill>
+                  <a:srgbClr val="7E9908"/>
+                </a:solidFill>
+                <a:latin typeface="Pretendard"/>
+              </a:rPr>
+              <a:t>대학생 신용홍보단 · 캠퍼스 어택 부스 운영</a:t>
+            </a:r>
+          </a:p>
+          <a:p>
+            <a:pPr algn="l">
+              <a:lnSpc>
+                <a:spcPct val="110000"/>
+              </a:lnSpc>
+              <a:spcBef>
+                <a:spcPts val="300"/>
+              </a:spcBef>
+            </a:pPr>
+            <a:r>
+              <a:rPr sz="1100" b="0">
+                <a:solidFill>
+                  <a:srgbClr val="5B6B7B"/>
+                </a:solidFill>
+                <a:latin typeface="Pretendard"/>
+              </a:rPr>
+              <a:t>올바른 신용카드 사용법 홍보 현장</a:t>
+            </a:r>
+          </a:p>
+        </p:txBody>
+      </p:sp>
+      <p:sp>
+        <p:nvSpPr>
+          <p:cNvPr id="12" name="Rounded Rectangle 11"/>
           <p:cNvSpPr/>
           <p:nvPr/>
         </p:nvSpPr>
         <p:spPr>
           <a:xfrm>
-            <a:off x="548640" y="4654296"/>
-            <a:ext cx="11109960" cy="1417320"/>
+            <a:off x="4398264" y="1417320"/>
+            <a:ext cx="3611880" cy="4892040"/>
           </a:xfrm>
           <a:prstGeom prst="roundRect">
             <a:avLst/>
@@ -7999,25 +7749,32 @@
       </p:sp>
       <p:sp>
         <p:nvSpPr>
-          <p:cNvPr id="18" name="Rectangle 17"/>
+          <p:cNvPr id="13" name="Rectangle 12"/>
           <p:cNvSpPr/>
           <p:nvPr/>
         </p:nvSpPr>
         <p:spPr>
           <a:xfrm>
-            <a:off x="548640" y="4654296"/>
-            <a:ext cx="201168" cy="1417320"/>
+            <a:off x="4601464" y="1620520"/>
+            <a:ext cx="3205480" cy="3251200"/>
           </a:xfrm>
           <a:prstGeom prst="rect">
             <a:avLst/>
           </a:prstGeom>
           <a:solidFill>
-            <a:srgbClr val="4FC0E8"/>
+            <a:srgbClr val="FFFFFF"/>
           </a:solidFill>
           <a:ln>
             <a:noFill/>
           </a:ln>
           <a:effectLst/>
+          <a:effectLst>
+            <a:outerShdw blurRad="90000" dist="38100" dir="5400000" rotWithShape="0">
+              <a:srgbClr val="1B2A3A">
+                <a:alpha val="22000"/>
+              </a:srgbClr>
+            </a:outerShdw>
+          </a:effectLst>
         </p:spPr>
         <p:style>
           <a:lnRef idx="1">
@@ -8041,77 +7798,48 @@
           </a:p>
         </p:txBody>
       </p:sp>
-      <p:sp>
-        <p:nvSpPr>
-          <p:cNvPr id="19" name="TextBox 18"/>
-          <p:cNvSpPr txBox="1"/>
-          <p:nvPr/>
-        </p:nvSpPr>
-        <p:spPr>
-          <a:xfrm>
-            <a:off x="960120" y="4818888"/>
-            <a:ext cx="4846320" cy="1097280"/>
+      <p:pic>
+        <p:nvPicPr>
+          <p:cNvPr id="14" name="Picture 13" descr="cert.jpg"/>
+          <p:cNvPicPr>
+            <a:picLocks noChangeAspect="1"/>
+          </p:cNvPicPr>
+          <p:nvPr/>
+        </p:nvPicPr>
+        <p:blipFill>
+          <a:blip r:embed="rId3"/>
+          <a:stretch>
+            <a:fillRect/>
+          </a:stretch>
+        </p:blipFill>
+        <p:spPr>
+          <a:xfrm>
+            <a:off x="4626864" y="1645920"/>
+            <a:ext cx="3154680" cy="3200400"/>
           </a:xfrm>
           <a:prstGeom prst="rect">
             <a:avLst/>
           </a:prstGeom>
+        </p:spPr>
+      </p:pic>
+      <p:sp>
+        <p:nvSpPr>
+          <p:cNvPr id="15" name="Rectangle 14"/>
+          <p:cNvSpPr/>
+          <p:nvPr/>
+        </p:nvSpPr>
+        <p:spPr>
+          <a:xfrm>
+            <a:off x="4626864" y="1645920"/>
+            <a:ext cx="3154680" cy="3200400"/>
+          </a:xfrm>
+          <a:prstGeom prst="rect">
+            <a:avLst/>
+          </a:prstGeom>
           <a:noFill/>
-        </p:spPr>
-        <p:txBody>
-          <a:bodyPr wrap="square" anchor="t" lIns="25400" rIns="25400" tIns="25400" bIns="25400">
-            <a:spAutoFit/>
-          </a:bodyPr>
-          <a:lstStyle/>
-          <a:p>
-            <a:pPr algn="l"/>
-            <a:r>
-              <a:rPr sz="1600" b="1">
-                <a:solidFill>
-                  <a:srgbClr val="0F2E4F"/>
-                </a:solidFill>
-                <a:latin typeface="Pretendard"/>
-              </a:rPr>
-              <a:t>소우주 기업 프로젝트</a:t>
-            </a:r>
-          </a:p>
-          <a:p>
-            <a:pPr algn="l">
-              <a:spcBef>
-                <a:spcPts val="400"/>
-              </a:spcBef>
-            </a:pPr>
-            <a:r>
-              <a:rPr sz="1250" b="0">
-                <a:solidFill>
-                  <a:srgbClr val="5B6B7B"/>
-                </a:solidFill>
-                <a:latin typeface="Pretendard"/>
-              </a:rPr>
-              <a:t>해외 마케팅 · 매출 증진 과제</a:t>
-            </a:r>
-          </a:p>
-        </p:txBody>
-      </p:sp>
-      <p:sp>
-        <p:nvSpPr>
-          <p:cNvPr id="20" name="Rounded Rectangle 19"/>
-          <p:cNvSpPr/>
-          <p:nvPr/>
-        </p:nvSpPr>
-        <p:spPr>
-          <a:xfrm>
-            <a:off x="6035040" y="4882896"/>
-            <a:ext cx="5486400" cy="960120"/>
-          </a:xfrm>
-          <a:prstGeom prst="roundRect">
-            <a:avLst/>
-          </a:prstGeom>
-          <a:solidFill>
-            <a:srgbClr val="F4F7FB"/>
-          </a:solidFill>
-          <a:ln w="12700">
+          <a:ln w="31750">
             <a:solidFill>
-              <a:srgbClr val="E2E8F0"/>
+              <a:srgbClr val="C6F016"/>
             </a:solidFill>
           </a:ln>
           <a:effectLst/>
@@ -8140,14 +7868,14 @@
       </p:sp>
       <p:sp>
         <p:nvSpPr>
-          <p:cNvPr id="21" name="TextBox 20"/>
+          <p:cNvPr id="16" name="TextBox 15"/>
           <p:cNvSpPr txBox="1"/>
           <p:nvPr/>
         </p:nvSpPr>
         <p:spPr>
           <a:xfrm>
-            <a:off x="6217920" y="4956048"/>
-            <a:ext cx="5212080" cy="822960"/>
+            <a:off x="4626864" y="4965192"/>
+            <a:ext cx="3154680" cy="1188720"/>
           </a:xfrm>
           <a:prstGeom prst="rect">
             <a:avLst/>
@@ -8162,33 +7890,294 @@
           <a:p>
             <a:pPr algn="l"/>
             <a:r>
-              <a:rPr sz="1100" b="1">
-                <a:solidFill>
-                  <a:srgbClr val="7E9908"/>
-                </a:solidFill>
-                <a:latin typeface="Pretendard"/>
-              </a:rPr>
-              <a:t>배운 점</a:t>
+              <a:rPr sz="1450" b="1">
+                <a:solidFill>
+                  <a:srgbClr val="0F2E4F"/>
+                </a:solidFill>
+                <a:latin typeface="Pretendard"/>
+              </a:rPr>
+              <a:t>EBS 군인자녀 멘토링</a:t>
             </a:r>
           </a:p>
           <a:p>
             <a:pPr algn="l">
               <a:lnSpc>
-                <a:spcPct val="112000"/>
+                <a:spcPct val="110000"/>
               </a:lnSpc>
               <a:spcBef>
                 <a:spcPts val="300"/>
               </a:spcBef>
             </a:pPr>
             <a:r>
-              <a:rPr sz="1250" b="1">
-                <a:solidFill>
-                  <a:srgbClr val="1E2933"/>
-                </a:solidFill>
-                <a:latin typeface="Pretendard"/>
-              </a:rPr>
-              <a:t>자료 분석과 팀 협업으로 문제를 풀어보며
-실전 감각과 기획 역량을 기름</a:t>
+              <a:rPr sz="1150" b="1">
+                <a:solidFill>
+                  <a:srgbClr val="7E9908"/>
+                </a:solidFill>
+                <a:latin typeface="Pretendard"/>
+              </a:rPr>
+              <a:t>2024 온라인 교육멘토링 활동 확인서</a:t>
+            </a:r>
+          </a:p>
+          <a:p>
+            <a:pPr algn="l">
+              <a:lnSpc>
+                <a:spcPct val="110000"/>
+              </a:lnSpc>
+              <a:spcBef>
+                <a:spcPts val="300"/>
+              </a:spcBef>
+            </a:pPr>
+            <a:r>
+              <a:rPr sz="1100" b="0">
+                <a:solidFill>
+                  <a:srgbClr val="5B6B7B"/>
+                </a:solidFill>
+                <a:latin typeface="Pretendard"/>
+              </a:rPr>
+              <a:t>학습멘토로 약 8개월간 활동 수료</a:t>
+            </a:r>
+          </a:p>
+        </p:txBody>
+      </p:sp>
+      <p:sp>
+        <p:nvSpPr>
+          <p:cNvPr id="17" name="Rounded Rectangle 16"/>
+          <p:cNvSpPr/>
+          <p:nvPr/>
+        </p:nvSpPr>
+        <p:spPr>
+          <a:xfrm>
+            <a:off x="8247888" y="1417320"/>
+            <a:ext cx="3611880" cy="4892040"/>
+          </a:xfrm>
+          <a:prstGeom prst="roundRect">
+            <a:avLst/>
+          </a:prstGeom>
+          <a:solidFill>
+            <a:srgbClr val="FFFFFF"/>
+          </a:solidFill>
+          <a:ln>
+            <a:noFill/>
+          </a:ln>
+          <a:effectLst/>
+          <a:effectLst>
+            <a:outerShdw blurRad="90000" dist="38100" dir="5400000" rotWithShape="0">
+              <a:srgbClr val="1B2A3A">
+                <a:alpha val="22000"/>
+              </a:srgbClr>
+            </a:outerShdw>
+          </a:effectLst>
+        </p:spPr>
+        <p:style>
+          <a:lnRef idx="1">
+            <a:schemeClr val="accent1"/>
+          </a:lnRef>
+          <a:fillRef idx="3">
+            <a:schemeClr val="accent1"/>
+          </a:fillRef>
+          <a:effectRef idx="2">
+            <a:schemeClr val="accent1"/>
+          </a:effectRef>
+          <a:fontRef idx="minor">
+            <a:schemeClr val="lt1"/>
+          </a:fontRef>
+        </p:style>
+        <p:txBody>
+          <a:bodyPr rtlCol="0" anchor="ctr"/>
+          <a:lstStyle/>
+          <a:p>
+            <a:pPr algn="ctr"/>
+          </a:p>
+        </p:txBody>
+      </p:sp>
+      <p:sp>
+        <p:nvSpPr>
+          <p:cNvPr id="18" name="Rectangle 17"/>
+          <p:cNvSpPr/>
+          <p:nvPr/>
+        </p:nvSpPr>
+        <p:spPr>
+          <a:xfrm>
+            <a:off x="8451088" y="1620520"/>
+            <a:ext cx="3205480" cy="3251200"/>
+          </a:xfrm>
+          <a:prstGeom prst="rect">
+            <a:avLst/>
+          </a:prstGeom>
+          <a:solidFill>
+            <a:srgbClr val="FFFFFF"/>
+          </a:solidFill>
+          <a:ln>
+            <a:noFill/>
+          </a:ln>
+          <a:effectLst/>
+          <a:effectLst>
+            <a:outerShdw blurRad="90000" dist="38100" dir="5400000" rotWithShape="0">
+              <a:srgbClr val="1B2A3A">
+                <a:alpha val="22000"/>
+              </a:srgbClr>
+            </a:outerShdw>
+          </a:effectLst>
+        </p:spPr>
+        <p:style>
+          <a:lnRef idx="1">
+            <a:schemeClr val="accent1"/>
+          </a:lnRef>
+          <a:fillRef idx="3">
+            <a:schemeClr val="accent1"/>
+          </a:fillRef>
+          <a:effectRef idx="2">
+            <a:schemeClr val="accent1"/>
+          </a:effectRef>
+          <a:fontRef idx="minor">
+            <a:schemeClr val="lt1"/>
+          </a:fontRef>
+        </p:style>
+        <p:txBody>
+          <a:bodyPr rtlCol="0" anchor="ctr"/>
+          <a:lstStyle/>
+          <a:p>
+            <a:pPr algn="ctr"/>
+          </a:p>
+        </p:txBody>
+      </p:sp>
+      <p:pic>
+        <p:nvPicPr>
+          <p:cNvPr id="19" name="Picture 18" descr="hf.jpg"/>
+          <p:cNvPicPr>
+            <a:picLocks noChangeAspect="1"/>
+          </p:cNvPicPr>
+          <p:nvPr/>
+        </p:nvPicPr>
+        <p:blipFill>
+          <a:blip r:embed="rId4"/>
+          <a:stretch>
+            <a:fillRect/>
+          </a:stretch>
+        </p:blipFill>
+        <p:spPr>
+          <a:xfrm>
+            <a:off x="8476488" y="1645920"/>
+            <a:ext cx="3154680" cy="3200400"/>
+          </a:xfrm>
+          <a:prstGeom prst="rect">
+            <a:avLst/>
+          </a:prstGeom>
+        </p:spPr>
+      </p:pic>
+      <p:sp>
+        <p:nvSpPr>
+          <p:cNvPr id="20" name="Rectangle 19"/>
+          <p:cNvSpPr/>
+          <p:nvPr/>
+        </p:nvSpPr>
+        <p:spPr>
+          <a:xfrm>
+            <a:off x="8476488" y="1645920"/>
+            <a:ext cx="3154680" cy="3200400"/>
+          </a:xfrm>
+          <a:prstGeom prst="rect">
+            <a:avLst/>
+          </a:prstGeom>
+          <a:noFill/>
+          <a:ln w="31750">
+            <a:solidFill>
+              <a:srgbClr val="C6F016"/>
+            </a:solidFill>
+          </a:ln>
+          <a:effectLst/>
+        </p:spPr>
+        <p:style>
+          <a:lnRef idx="1">
+            <a:schemeClr val="accent1"/>
+          </a:lnRef>
+          <a:fillRef idx="3">
+            <a:schemeClr val="accent1"/>
+          </a:fillRef>
+          <a:effectRef idx="2">
+            <a:schemeClr val="accent1"/>
+          </a:effectRef>
+          <a:fontRef idx="minor">
+            <a:schemeClr val="lt1"/>
+          </a:fontRef>
+        </p:style>
+        <p:txBody>
+          <a:bodyPr rtlCol="0" anchor="ctr"/>
+          <a:lstStyle/>
+          <a:p>
+            <a:pPr algn="ctr"/>
+          </a:p>
+        </p:txBody>
+      </p:sp>
+      <p:sp>
+        <p:nvSpPr>
+          <p:cNvPr id="21" name="TextBox 20"/>
+          <p:cNvSpPr txBox="1"/>
+          <p:nvPr/>
+        </p:nvSpPr>
+        <p:spPr>
+          <a:xfrm>
+            <a:off x="8476488" y="4965192"/>
+            <a:ext cx="3154680" cy="1188720"/>
+          </a:xfrm>
+          <a:prstGeom prst="rect">
+            <a:avLst/>
+          </a:prstGeom>
+          <a:noFill/>
+        </p:spPr>
+        <p:txBody>
+          <a:bodyPr wrap="square" anchor="t" lIns="25400" rIns="25400" tIns="25400" bIns="25400">
+            <a:spAutoFit/>
+          </a:bodyPr>
+          <a:lstStyle/>
+          <a:p>
+            <a:pPr algn="l"/>
+            <a:r>
+              <a:rPr sz="1450" b="1">
+                <a:solidFill>
+                  <a:srgbClr val="0F2E4F"/>
+                </a:solidFill>
+                <a:latin typeface="Pretendard"/>
+              </a:rPr>
+              <a:t>한국주택금융공사</a:t>
+            </a:r>
+          </a:p>
+          <a:p>
+            <a:pPr algn="l">
+              <a:lnSpc>
+                <a:spcPct val="110000"/>
+              </a:lnSpc>
+              <a:spcBef>
+                <a:spcPts val="300"/>
+              </a:spcBef>
+            </a:pPr>
+            <a:r>
+              <a:rPr sz="1150" b="1">
+                <a:solidFill>
+                  <a:srgbClr val="7E9908"/>
+                </a:solidFill>
+                <a:latin typeface="Pretendard"/>
+              </a:rPr>
+              <a:t>제2기 HF 대학생 홍보 서포터즈 임명장</a:t>
+            </a:r>
+          </a:p>
+          <a:p>
+            <a:pPr algn="l">
+              <a:lnSpc>
+                <a:spcPct val="110000"/>
+              </a:lnSpc>
+              <a:spcBef>
+                <a:spcPts val="300"/>
+              </a:spcBef>
+            </a:pPr>
+            <a:r>
+              <a:rPr sz="1100" b="0">
+                <a:solidFill>
+                  <a:srgbClr val="5B6B7B"/>
+                </a:solidFill>
+                <a:latin typeface="Pretendard"/>
+              </a:rPr>
+              <a:t>주택금융 콘텐츠 제작 서포터즈 임명</a:t>
             </a:r>
           </a:p>
         </p:txBody>
@@ -8337,7 +8326,7 @@
                 </a:solidFill>
                 <a:latin typeface="Pretendard"/>
               </a:rPr>
-              <a:t>ROADMAP  ·  앞으로의 계획</a:t>
+              <a:t>HIGHLIGHTS  ·  활동에서 배운 것</a:t>
             </a:r>
           </a:p>
         </p:txBody>
@@ -8372,7 +8361,7 @@
                 </a:solidFill>
                 <a:latin typeface="Pretendard"/>
               </a:rPr>
-              <a:t>목표 달성 로드맵</a:t>
+              <a:t>핵심 활동 심화</a:t>
             </a:r>
           </a:p>
         </p:txBody>
@@ -8432,111 +8421,14 @@
       </p:sp>
       <p:sp>
         <p:nvSpPr>
-          <p:cNvPr id="7" name="Rectangle 6"/>
+          <p:cNvPr id="7" name="Rounded Rectangle 6"/>
           <p:cNvSpPr/>
           <p:nvPr/>
         </p:nvSpPr>
         <p:spPr>
           <a:xfrm>
-            <a:off x="731520" y="2148840"/>
-            <a:ext cx="10561320" cy="38100"/>
-          </a:xfrm>
-          <a:prstGeom prst="rect">
-            <a:avLst/>
-          </a:prstGeom>
-          <a:solidFill>
-            <a:srgbClr val="1B446E"/>
-          </a:solidFill>
-          <a:ln>
-            <a:noFill/>
-          </a:ln>
-          <a:effectLst/>
-        </p:spPr>
-        <p:style>
-          <a:lnRef idx="1">
-            <a:schemeClr val="accent1"/>
-          </a:lnRef>
-          <a:fillRef idx="3">
-            <a:schemeClr val="accent1"/>
-          </a:fillRef>
-          <a:effectRef idx="2">
-            <a:schemeClr val="accent1"/>
-          </a:effectRef>
-          <a:fontRef idx="minor">
-            <a:schemeClr val="lt1"/>
-          </a:fontRef>
-        </p:style>
-        <p:txBody>
-          <a:bodyPr rtlCol="0" anchor="ctr"/>
-          <a:lstStyle/>
-          <a:p>
-            <a:pPr algn="ctr"/>
-          </a:p>
-        </p:txBody>
-      </p:sp>
-      <p:sp>
-        <p:nvSpPr>
-          <p:cNvPr id="8" name="Oval 7"/>
-          <p:cNvSpPr/>
-          <p:nvPr/>
-        </p:nvSpPr>
-        <p:spPr>
-          <a:xfrm>
-            <a:off x="1627632" y="1874520"/>
-            <a:ext cx="512064" cy="512064"/>
-          </a:xfrm>
-          <a:prstGeom prst="ellipse">
-            <a:avLst/>
-          </a:prstGeom>
-          <a:solidFill>
-            <a:srgbClr val="C6F016"/>
-          </a:solidFill>
-          <a:ln>
-            <a:noFill/>
-          </a:ln>
-          <a:effectLst/>
-        </p:spPr>
-        <p:style>
-          <a:lnRef idx="1">
-            <a:schemeClr val="accent1"/>
-          </a:lnRef>
-          <a:fillRef idx="3">
-            <a:schemeClr val="accent1"/>
-          </a:fillRef>
-          <a:effectRef idx="2">
-            <a:schemeClr val="accent1"/>
-          </a:effectRef>
-          <a:fontRef idx="minor">
-            <a:schemeClr val="lt1"/>
-          </a:fontRef>
-        </p:style>
-        <p:txBody>
-          <a:bodyPr rtlCol="0" anchor="ctr" wrap="square"/>
-          <a:lstStyle/>
-          <a:p>
-            <a:pPr algn="ctr"/>
-            <a:r>
-              <a:rPr sz="1800" b="1">
-                <a:solidFill>
-                  <a:srgbClr val="0F2E4F"/>
-                </a:solidFill>
-                <a:latin typeface="Pretendard"/>
-              </a:rPr>
-              <a:t>1</a:t>
-            </a:r>
-          </a:p>
-        </p:txBody>
-      </p:sp>
-      <p:sp>
-        <p:nvSpPr>
-          <p:cNvPr id="9" name="Rounded Rectangle 8"/>
-          <p:cNvSpPr/>
-          <p:nvPr/>
-        </p:nvSpPr>
-        <p:spPr>
-          <a:xfrm>
-            <a:off x="548640" y="2514600"/>
-            <a:ext cx="2670048" cy="3063240"/>
+            <a:off x="548640" y="1508760"/>
+            <a:ext cx="11109960" cy="1417320"/>
           </a:xfrm>
           <a:prstGeom prst="roundRect">
             <a:avLst/>
@@ -8580,188 +8472,16 @@
       </p:sp>
       <p:sp>
         <p:nvSpPr>
-          <p:cNvPr id="10" name="Rounded Rectangle 9"/>
+          <p:cNvPr id="8" name="Rectangle 7"/>
           <p:cNvSpPr/>
           <p:nvPr/>
         </p:nvSpPr>
         <p:spPr>
           <a:xfrm>
-            <a:off x="548640" y="2514600"/>
-            <a:ext cx="2670048" cy="841248"/>
-          </a:xfrm>
-          <a:prstGeom prst="roundRect">
-            <a:avLst/>
-          </a:prstGeom>
-          <a:solidFill>
-            <a:srgbClr val="0F2E4F"/>
-          </a:solidFill>
-          <a:ln>
-            <a:noFill/>
-          </a:ln>
-          <a:effectLst/>
-        </p:spPr>
-        <p:style>
-          <a:lnRef idx="1">
-            <a:schemeClr val="accent1"/>
-          </a:lnRef>
-          <a:fillRef idx="3">
-            <a:schemeClr val="accent1"/>
-          </a:fillRef>
-          <a:effectRef idx="2">
-            <a:schemeClr val="accent1"/>
-          </a:effectRef>
-          <a:fontRef idx="minor">
-            <a:schemeClr val="lt1"/>
-          </a:fontRef>
-        </p:style>
-        <p:txBody>
-          <a:bodyPr rtlCol="0" anchor="ctr" wrap="square"/>
-          <a:lstStyle/>
-          <a:p>
-            <a:pPr algn="ctr"/>
-            <a:r>
-              <a:rPr sz="1200" b="1">
-                <a:solidFill>
-                  <a:srgbClr val="C6F016"/>
-                </a:solidFill>
-                <a:latin typeface="Pretendard"/>
-              </a:rPr>
-              <a:t>2026 하반기</a:t>
-            </a:r>
-          </a:p>
-          <a:p>
-            <a:pPr algn="ctr"/>
-            <a:r>
-              <a:rPr sz="1450" b="1">
-                <a:solidFill>
-                  <a:srgbClr val="FFFFFF"/>
-                </a:solidFill>
-                <a:latin typeface="Pretendard"/>
-              </a:rPr>
-              <a:t>현장실습 (인턴십)</a:t>
-            </a:r>
-          </a:p>
-        </p:txBody>
-      </p:sp>
-      <p:sp>
-        <p:nvSpPr>
-          <p:cNvPr id="11" name="TextBox 10"/>
-          <p:cNvSpPr txBox="1"/>
-          <p:nvPr/>
-        </p:nvSpPr>
-        <p:spPr>
-          <a:xfrm>
-            <a:off x="749808" y="3520440"/>
-            <a:ext cx="2286000" cy="2011680"/>
+            <a:off x="548640" y="1508760"/>
+            <a:ext cx="201168" cy="1417320"/>
           </a:xfrm>
           <a:prstGeom prst="rect">
-            <a:avLst/>
-          </a:prstGeom>
-          <a:noFill/>
-        </p:spPr>
-        <p:txBody>
-          <a:bodyPr wrap="square" anchor="t" lIns="25400" rIns="25400" tIns="25400" bIns="25400">
-            <a:spAutoFit/>
-          </a:bodyPr>
-          <a:lstStyle/>
-          <a:p>
-            <a:pPr algn="l">
-              <a:lnSpc>
-                <a:spcPct val="105000"/>
-              </a:lnSpc>
-              <a:spcBef>
-                <a:spcPts val="800"/>
-              </a:spcBef>
-            </a:pPr>
-            <a:r>
-              <a:rPr sz="1250" b="1">
-                <a:solidFill>
-                  <a:srgbClr val="7E9908"/>
-                </a:solidFill>
-                <a:latin typeface="Pretendard"/>
-              </a:rPr>
-              <a:t>▸ </a:t>
-            </a:r>
-            <a:r>
-              <a:rPr sz="1250" b="0">
-                <a:solidFill>
-                  <a:srgbClr val="1E2933"/>
-                </a:solidFill>
-                <a:latin typeface="Pretendard"/>
-              </a:rPr>
-              <a:t>금융권 현장실습 참여</a:t>
-            </a:r>
-          </a:p>
-          <a:p>
-            <a:pPr algn="l">
-              <a:lnSpc>
-                <a:spcPct val="105000"/>
-              </a:lnSpc>
-              <a:spcBef>
-                <a:spcPts val="800"/>
-              </a:spcBef>
-            </a:pPr>
-            <a:r>
-              <a:rPr sz="1250" b="1">
-                <a:solidFill>
-                  <a:srgbClr val="7E9908"/>
-                </a:solidFill>
-                <a:latin typeface="Pretendard"/>
-              </a:rPr>
-              <a:t>▸ </a:t>
-            </a:r>
-            <a:r>
-              <a:rPr sz="1250" b="0">
-                <a:solidFill>
-                  <a:srgbClr val="1E2933"/>
-                </a:solidFill>
-                <a:latin typeface="Pretendard"/>
-              </a:rPr>
-              <a:t>실무와 직무를 직접 경험</a:t>
-            </a:r>
-          </a:p>
-          <a:p>
-            <a:pPr algn="l">
-              <a:lnSpc>
-                <a:spcPct val="105000"/>
-              </a:lnSpc>
-              <a:spcBef>
-                <a:spcPts val="800"/>
-              </a:spcBef>
-            </a:pPr>
-            <a:r>
-              <a:rPr sz="1250" b="1">
-                <a:solidFill>
-                  <a:srgbClr val="7E9908"/>
-                </a:solidFill>
-                <a:latin typeface="Pretendard"/>
-              </a:rPr>
-              <a:t>▸ </a:t>
-            </a:r>
-            <a:r>
-              <a:rPr sz="1250" b="0">
-                <a:solidFill>
-                  <a:srgbClr val="1E2933"/>
-                </a:solidFill>
-                <a:latin typeface="Pretendard"/>
-              </a:rPr>
-              <a:t>현업 분위기 · 일 익히기</a:t>
-            </a:r>
-          </a:p>
-        </p:txBody>
-      </p:sp>
-      <p:sp>
-        <p:nvSpPr>
-          <p:cNvPr id="12" name="Oval 11"/>
-          <p:cNvSpPr/>
-          <p:nvPr/>
-        </p:nvSpPr>
-        <p:spPr>
-          <a:xfrm>
-            <a:off x="4462272" y="1874520"/>
-            <a:ext cx="512064" cy="512064"/>
-          </a:xfrm>
-          <a:prstGeom prst="ellipse">
             <a:avLst/>
           </a:prstGeom>
           <a:solidFill>
@@ -8787,32 +8507,175 @@
           </a:fontRef>
         </p:style>
         <p:txBody>
-          <a:bodyPr rtlCol="0" anchor="ctr" wrap="square"/>
+          <a:bodyPr rtlCol="0" anchor="ctr"/>
           <a:lstStyle/>
           <a:p>
             <a:pPr algn="ctr"/>
-            <a:r>
-              <a:rPr sz="1800" b="1">
+          </a:p>
+        </p:txBody>
+      </p:sp>
+      <p:sp>
+        <p:nvSpPr>
+          <p:cNvPr id="9" name="TextBox 8"/>
+          <p:cNvSpPr txBox="1"/>
+          <p:nvPr/>
+        </p:nvSpPr>
+        <p:spPr>
+          <a:xfrm>
+            <a:off x="960120" y="1673352"/>
+            <a:ext cx="4846320" cy="1097280"/>
+          </a:xfrm>
+          <a:prstGeom prst="rect">
+            <a:avLst/>
+          </a:prstGeom>
+          <a:noFill/>
+        </p:spPr>
+        <p:txBody>
+          <a:bodyPr wrap="square" anchor="t" lIns="25400" rIns="25400" tIns="25400" bIns="25400">
+            <a:spAutoFit/>
+          </a:bodyPr>
+          <a:lstStyle/>
+          <a:p>
+            <a:pPr algn="l"/>
+            <a:r>
+              <a:rPr sz="1600" b="1">
                 <a:solidFill>
                   <a:srgbClr val="0F2E4F"/>
                 </a:solidFill>
                 <a:latin typeface="Pretendard"/>
               </a:rPr>
-              <a:t>2</a:t>
-            </a:r>
-          </a:p>
-        </p:txBody>
-      </p:sp>
-      <p:sp>
-        <p:nvSpPr>
-          <p:cNvPr id="13" name="Rounded Rectangle 12"/>
+              <a:t>서포크레딧 · 주택금융 서포터즈</a:t>
+            </a:r>
+          </a:p>
+          <a:p>
+            <a:pPr algn="l">
+              <a:spcBef>
+                <a:spcPts val="400"/>
+              </a:spcBef>
+            </a:pPr>
+            <a:r>
+              <a:rPr sz="1250" b="0">
+                <a:solidFill>
+                  <a:srgbClr val="5B6B7B"/>
+                </a:solidFill>
+                <a:latin typeface="Pretendard"/>
+              </a:rPr>
+              <a:t>금융 콘텐츠 기획 · 제작, 홍보</a:t>
+            </a:r>
+          </a:p>
+        </p:txBody>
+      </p:sp>
+      <p:sp>
+        <p:nvSpPr>
+          <p:cNvPr id="10" name="Rounded Rectangle 9"/>
           <p:cNvSpPr/>
           <p:nvPr/>
         </p:nvSpPr>
         <p:spPr>
           <a:xfrm>
-            <a:off x="3383280" y="2514600"/>
-            <a:ext cx="2670048" cy="3063240"/>
+            <a:off x="6035040" y="1737360"/>
+            <a:ext cx="5486400" cy="960120"/>
+          </a:xfrm>
+          <a:prstGeom prst="roundRect">
+            <a:avLst/>
+          </a:prstGeom>
+          <a:solidFill>
+            <a:srgbClr val="F4F7FB"/>
+          </a:solidFill>
+          <a:ln w="12700">
+            <a:solidFill>
+              <a:srgbClr val="E2E8F0"/>
+            </a:solidFill>
+          </a:ln>
+          <a:effectLst/>
+        </p:spPr>
+        <p:style>
+          <a:lnRef idx="1">
+            <a:schemeClr val="accent1"/>
+          </a:lnRef>
+          <a:fillRef idx="3">
+            <a:schemeClr val="accent1"/>
+          </a:fillRef>
+          <a:effectRef idx="2">
+            <a:schemeClr val="accent1"/>
+          </a:effectRef>
+          <a:fontRef idx="minor">
+            <a:schemeClr val="lt1"/>
+          </a:fontRef>
+        </p:style>
+        <p:txBody>
+          <a:bodyPr rtlCol="0" anchor="ctr"/>
+          <a:lstStyle/>
+          <a:p>
+            <a:pPr algn="ctr"/>
+          </a:p>
+        </p:txBody>
+      </p:sp>
+      <p:sp>
+        <p:nvSpPr>
+          <p:cNvPr id="11" name="TextBox 10"/>
+          <p:cNvSpPr txBox="1"/>
+          <p:nvPr/>
+        </p:nvSpPr>
+        <p:spPr>
+          <a:xfrm>
+            <a:off x="6217920" y="1810512"/>
+            <a:ext cx="5212080" cy="822960"/>
+          </a:xfrm>
+          <a:prstGeom prst="rect">
+            <a:avLst/>
+          </a:prstGeom>
+          <a:noFill/>
+        </p:spPr>
+        <p:txBody>
+          <a:bodyPr wrap="square" anchor="t" lIns="25400" rIns="25400" tIns="25400" bIns="25400">
+            <a:spAutoFit/>
+          </a:bodyPr>
+          <a:lstStyle/>
+          <a:p>
+            <a:pPr algn="l"/>
+            <a:r>
+              <a:rPr sz="1100" b="1">
+                <a:solidFill>
+                  <a:srgbClr val="7E9908"/>
+                </a:solidFill>
+                <a:latin typeface="Pretendard"/>
+              </a:rPr>
+              <a:t>배운 점</a:t>
+            </a:r>
+          </a:p>
+          <a:p>
+            <a:pPr algn="l">
+              <a:lnSpc>
+                <a:spcPct val="112000"/>
+              </a:lnSpc>
+              <a:spcBef>
+                <a:spcPts val="300"/>
+              </a:spcBef>
+            </a:pPr>
+            <a:r>
+              <a:rPr sz="1250" b="1">
+                <a:solidFill>
+                  <a:srgbClr val="1E2933"/>
+                </a:solidFill>
+                <a:latin typeface="Pretendard"/>
+              </a:rPr>
+              <a:t>어려운 내용을 쉽게 전달하는 경험을 쌓으며
+금융 분야에 대한 관심이 커짐</a:t>
+            </a:r>
+          </a:p>
+        </p:txBody>
+      </p:sp>
+      <p:sp>
+        <p:nvSpPr>
+          <p:cNvPr id="12" name="Rounded Rectangle 11"/>
+          <p:cNvSpPr/>
+          <p:nvPr/>
+        </p:nvSpPr>
+        <p:spPr>
+          <a:xfrm>
+            <a:off x="548640" y="3081528"/>
+            <a:ext cx="11109960" cy="1417320"/>
           </a:xfrm>
           <a:prstGeom prst="roundRect">
             <a:avLst/>
@@ -8856,20 +8719,20 @@
       </p:sp>
       <p:sp>
         <p:nvSpPr>
-          <p:cNvPr id="14" name="Rounded Rectangle 13"/>
+          <p:cNvPr id="13" name="Rectangle 12"/>
           <p:cNvSpPr/>
           <p:nvPr/>
         </p:nvSpPr>
         <p:spPr>
           <a:xfrm>
-            <a:off x="3383280" y="2514600"/>
-            <a:ext cx="2670048" cy="841248"/>
-          </a:xfrm>
-          <a:prstGeom prst="roundRect">
+            <a:off x="548640" y="3081528"/>
+            <a:ext cx="201168" cy="1417320"/>
+          </a:xfrm>
+          <a:prstGeom prst="rect">
             <a:avLst/>
           </a:prstGeom>
           <a:solidFill>
-            <a:srgbClr val="0F2E4F"/>
+            <a:srgbClr val="E8B44A"/>
           </a:solidFill>
           <a:ln>
             <a:noFill/>
@@ -8891,44 +8754,23 @@
           </a:fontRef>
         </p:style>
         <p:txBody>
-          <a:bodyPr rtlCol="0" anchor="ctr" wrap="square"/>
+          <a:bodyPr rtlCol="0" anchor="ctr"/>
           <a:lstStyle/>
           <a:p>
             <a:pPr algn="ctr"/>
-            <a:r>
-              <a:rPr sz="1200" b="1">
-                <a:solidFill>
-                  <a:srgbClr val="C6F016"/>
-                </a:solidFill>
-                <a:latin typeface="Pretendard"/>
-              </a:rPr>
-              <a:t>2027 상반기</a:t>
-            </a:r>
-          </a:p>
-          <a:p>
-            <a:pPr algn="ctr"/>
-            <a:r>
-              <a:rPr sz="1450" b="1">
-                <a:solidFill>
-                  <a:srgbClr val="FFFFFF"/>
-                </a:solidFill>
-                <a:latin typeface="Pretendard"/>
-              </a:rPr>
-              <a:t>역량 다지기</a:t>
-            </a:r>
-          </a:p>
-        </p:txBody>
-      </p:sp>
-      <p:sp>
-        <p:nvSpPr>
-          <p:cNvPr id="15" name="TextBox 14"/>
+          </a:p>
+        </p:txBody>
+      </p:sp>
+      <p:sp>
+        <p:nvSpPr>
+          <p:cNvPr id="14" name="TextBox 13"/>
           <p:cNvSpPr txBox="1"/>
           <p:nvPr/>
         </p:nvSpPr>
         <p:spPr>
           <a:xfrm>
-            <a:off x="3584448" y="3520440"/>
-            <a:ext cx="2286000" cy="2011680"/>
+            <a:off x="960120" y="3246120"/>
+            <a:ext cx="4846320" cy="1097280"/>
           </a:xfrm>
           <a:prstGeom prst="rect">
             <a:avLst/>
@@ -8941,110 +8783,56 @@
           </a:bodyPr>
           <a:lstStyle/>
           <a:p>
+            <a:pPr algn="l"/>
+            <a:r>
+              <a:rPr sz="1600" b="1">
+                <a:solidFill>
+                  <a:srgbClr val="0F2E4F"/>
+                </a:solidFill>
+                <a:latin typeface="Pretendard"/>
+              </a:rPr>
+              <a:t>군인자녀 · 사회리더 멘토링</a:t>
+            </a:r>
+          </a:p>
+          <a:p>
             <a:pPr algn="l">
-              <a:lnSpc>
-                <a:spcPct val="105000"/>
-              </a:lnSpc>
               <a:spcBef>
-                <a:spcPts val="800"/>
+                <a:spcPts val="400"/>
               </a:spcBef>
             </a:pPr>
             <a:r>
-              <a:rPr sz="1250" b="1">
-                <a:solidFill>
-                  <a:srgbClr val="7E9908"/>
-                </a:solidFill>
-                <a:latin typeface="Pretendard"/>
-              </a:rPr>
-              <a:t>▸ </a:t>
-            </a:r>
-            <a:r>
               <a:rPr sz="1250" b="0">
                 <a:solidFill>
-                  <a:srgbClr val="1E2933"/>
-                </a:solidFill>
-                <a:latin typeface="Pretendard"/>
-              </a:rPr>
-              <a:t>관련 자격증 준비</a:t>
-            </a:r>
-          </a:p>
-          <a:p>
-            <a:pPr algn="l">
-              <a:lnSpc>
-                <a:spcPct val="105000"/>
-              </a:lnSpc>
-              <a:spcBef>
-                <a:spcPts val="800"/>
-              </a:spcBef>
-            </a:pPr>
-            <a:r>
-              <a:rPr sz="1250" b="1">
-                <a:solidFill>
-                  <a:srgbClr val="7E9908"/>
-                </a:solidFill>
-                <a:latin typeface="Pretendard"/>
-              </a:rPr>
-              <a:t>▸ </a:t>
-            </a:r>
-            <a:r>
-              <a:rPr sz="1250" b="0">
-                <a:solidFill>
-                  <a:srgbClr val="1E2933"/>
-                </a:solidFill>
-                <a:latin typeface="Pretendard"/>
-              </a:rPr>
-              <a:t>보험 · 재무 전공 심화</a:t>
-            </a:r>
-          </a:p>
-          <a:p>
-            <a:pPr algn="l">
-              <a:lnSpc>
-                <a:spcPct val="105000"/>
-              </a:lnSpc>
-              <a:spcBef>
-                <a:spcPts val="800"/>
-              </a:spcBef>
-            </a:pPr>
-            <a:r>
-              <a:rPr sz="1250" b="1">
-                <a:solidFill>
-                  <a:srgbClr val="7E9908"/>
-                </a:solidFill>
-                <a:latin typeface="Pretendard"/>
-              </a:rPr>
-              <a:t>▸ </a:t>
-            </a:r>
-            <a:r>
-              <a:rPr sz="1250" b="0">
-                <a:solidFill>
-                  <a:srgbClr val="1E2933"/>
-                </a:solidFill>
-                <a:latin typeface="Pretendard"/>
-              </a:rPr>
-              <a:t>자료 분석 역량 학습</a:t>
-            </a:r>
-          </a:p>
-        </p:txBody>
-      </p:sp>
-      <p:sp>
-        <p:nvSpPr>
-          <p:cNvPr id="16" name="Oval 15"/>
+                  <a:srgbClr val="5B6B7B"/>
+                </a:solidFill>
+                <a:latin typeface="Pretendard"/>
+              </a:rPr>
+              <a:t>장기 멘토링 · 멘티 경험</a:t>
+            </a:r>
+          </a:p>
+        </p:txBody>
+      </p:sp>
+      <p:sp>
+        <p:nvSpPr>
+          <p:cNvPr id="15" name="Rounded Rectangle 14"/>
           <p:cNvSpPr/>
           <p:nvPr/>
         </p:nvSpPr>
         <p:spPr>
           <a:xfrm>
-            <a:off x="7296912" y="1874520"/>
-            <a:ext cx="512064" cy="512064"/>
-          </a:xfrm>
-          <a:prstGeom prst="ellipse">
+            <a:off x="6035040" y="3310128"/>
+            <a:ext cx="5486400" cy="960120"/>
+          </a:xfrm>
+          <a:prstGeom prst="roundRect">
             <a:avLst/>
           </a:prstGeom>
           <a:solidFill>
-            <a:srgbClr val="C6F016"/>
+            <a:srgbClr val="F4F7FB"/>
           </a:solidFill>
-          <a:ln>
-            <a:noFill/>
+          <a:ln w="12700">
+            <a:solidFill>
+              <a:srgbClr val="E2E8F0"/>
+            </a:solidFill>
           </a:ln>
           <a:effectLst/>
         </p:spPr>
@@ -9063,18 +8851,64 @@
           </a:fontRef>
         </p:style>
         <p:txBody>
-          <a:bodyPr rtlCol="0" anchor="ctr" wrap="square"/>
+          <a:bodyPr rtlCol="0" anchor="ctr"/>
           <a:lstStyle/>
           <a:p>
             <a:pPr algn="ctr"/>
-            <a:r>
-              <a:rPr sz="1800" b="1">
-                <a:solidFill>
-                  <a:srgbClr val="0F2E4F"/>
-                </a:solidFill>
-                <a:latin typeface="Pretendard"/>
-              </a:rPr>
-              <a:t>3</a:t>
+          </a:p>
+        </p:txBody>
+      </p:sp>
+      <p:sp>
+        <p:nvSpPr>
+          <p:cNvPr id="16" name="TextBox 15"/>
+          <p:cNvSpPr txBox="1"/>
+          <p:nvPr/>
+        </p:nvSpPr>
+        <p:spPr>
+          <a:xfrm>
+            <a:off x="6217920" y="3383280"/>
+            <a:ext cx="5212080" cy="822960"/>
+          </a:xfrm>
+          <a:prstGeom prst="rect">
+            <a:avLst/>
+          </a:prstGeom>
+          <a:noFill/>
+        </p:spPr>
+        <p:txBody>
+          <a:bodyPr wrap="square" anchor="t" lIns="25400" rIns="25400" tIns="25400" bIns="25400">
+            <a:spAutoFit/>
+          </a:bodyPr>
+          <a:lstStyle/>
+          <a:p>
+            <a:pPr algn="l"/>
+            <a:r>
+              <a:rPr sz="1100" b="1">
+                <a:solidFill>
+                  <a:srgbClr val="7E9908"/>
+                </a:solidFill>
+                <a:latin typeface="Pretendard"/>
+              </a:rPr>
+              <a:t>배운 점</a:t>
+            </a:r>
+          </a:p>
+          <a:p>
+            <a:pPr algn="l">
+              <a:lnSpc>
+                <a:spcPct val="112000"/>
+              </a:lnSpc>
+              <a:spcBef>
+                <a:spcPts val="300"/>
+              </a:spcBef>
+            </a:pPr>
+            <a:r>
+              <a:rPr sz="1250" b="1">
+                <a:solidFill>
+                  <a:srgbClr val="1E2933"/>
+                </a:solidFill>
+                <a:latin typeface="Pretendard"/>
+              </a:rPr>
+              <a:t>꾸준히 관계를 이어가는 책임감과
+경영·진로에 대한 시야를 넓힘</a:t>
             </a:r>
           </a:p>
         </p:txBody>
@@ -9087,8 +8921,8 @@
         </p:nvSpPr>
         <p:spPr>
           <a:xfrm>
-            <a:off x="6217920" y="2514600"/>
-            <a:ext cx="2670048" cy="3063240"/>
+            <a:off x="548640" y="4654296"/>
+            <a:ext cx="11109960" cy="1417320"/>
           </a:xfrm>
           <a:prstGeom prst="roundRect">
             <a:avLst/>
@@ -9132,20 +8966,20 @@
       </p:sp>
       <p:sp>
         <p:nvSpPr>
-          <p:cNvPr id="18" name="Rounded Rectangle 17"/>
+          <p:cNvPr id="18" name="Rectangle 17"/>
           <p:cNvSpPr/>
           <p:nvPr/>
         </p:nvSpPr>
         <p:spPr>
           <a:xfrm>
-            <a:off x="6217920" y="2514600"/>
-            <a:ext cx="2670048" cy="841248"/>
-          </a:xfrm>
-          <a:prstGeom prst="roundRect">
+            <a:off x="548640" y="4654296"/>
+            <a:ext cx="201168" cy="1417320"/>
+          </a:xfrm>
+          <a:prstGeom prst="rect">
             <a:avLst/>
           </a:prstGeom>
           <a:solidFill>
-            <a:srgbClr val="0F2E4F"/>
+            <a:srgbClr val="4FC0E8"/>
           </a:solidFill>
           <a:ln>
             <a:noFill/>
@@ -9167,31 +9001,10 @@
           </a:fontRef>
         </p:style>
         <p:txBody>
-          <a:bodyPr rtlCol="0" anchor="ctr" wrap="square"/>
+          <a:bodyPr rtlCol="0" anchor="ctr"/>
           <a:lstStyle/>
           <a:p>
             <a:pPr algn="ctr"/>
-            <a:r>
-              <a:rPr sz="1200" b="1">
-                <a:solidFill>
-                  <a:srgbClr val="C6F016"/>
-                </a:solidFill>
-                <a:latin typeface="Pretendard"/>
-              </a:rPr>
-              <a:t>2027 하반기</a:t>
-            </a:r>
-          </a:p>
-          <a:p>
-            <a:pPr algn="ctr"/>
-            <a:r>
-              <a:rPr sz="1450" b="1">
-                <a:solidFill>
-                  <a:srgbClr val="FFFFFF"/>
-                </a:solidFill>
-                <a:latin typeface="Pretendard"/>
-              </a:rPr>
-              <a:t>취업 준비 집중</a:t>
-            </a:r>
           </a:p>
         </p:txBody>
       </p:sp>
@@ -9203,8 +9016,8 @@
         </p:nvSpPr>
         <p:spPr>
           <a:xfrm>
-            <a:off x="6419088" y="3520440"/>
-            <a:ext cx="2286000" cy="2011680"/>
+            <a:off x="960120" y="4818888"/>
+            <a:ext cx="4846320" cy="1097280"/>
           </a:xfrm>
           <a:prstGeom prst="rect">
             <a:avLst/>
@@ -9217,110 +9030,56 @@
           </a:bodyPr>
           <a:lstStyle/>
           <a:p>
+            <a:pPr algn="l"/>
+            <a:r>
+              <a:rPr sz="1600" b="1">
+                <a:solidFill>
+                  <a:srgbClr val="0F2E4F"/>
+                </a:solidFill>
+                <a:latin typeface="Pretendard"/>
+              </a:rPr>
+              <a:t>소우주 기업 프로젝트</a:t>
+            </a:r>
+          </a:p>
+          <a:p>
             <a:pPr algn="l">
-              <a:lnSpc>
-                <a:spcPct val="105000"/>
-              </a:lnSpc>
               <a:spcBef>
-                <a:spcPts val="800"/>
+                <a:spcPts val="400"/>
               </a:spcBef>
             </a:pPr>
             <a:r>
-              <a:rPr sz="1250" b="1">
-                <a:solidFill>
-                  <a:srgbClr val="7E9908"/>
-                </a:solidFill>
-                <a:latin typeface="Pretendard"/>
-              </a:rPr>
-              <a:t>▸ </a:t>
-            </a:r>
-            <a:r>
               <a:rPr sz="1250" b="0">
                 <a:solidFill>
-                  <a:srgbClr val="1E2933"/>
-                </a:solidFill>
-                <a:latin typeface="Pretendard"/>
-              </a:rPr>
-              <a:t>자기소개서 · 포트폴리오 정리</a:t>
-            </a:r>
-          </a:p>
-          <a:p>
-            <a:pPr algn="l">
-              <a:lnSpc>
-                <a:spcPct val="105000"/>
-              </a:lnSpc>
-              <a:spcBef>
-                <a:spcPts val="800"/>
-              </a:spcBef>
-            </a:pPr>
-            <a:r>
-              <a:rPr sz="1250" b="1">
-                <a:solidFill>
-                  <a:srgbClr val="7E9908"/>
-                </a:solidFill>
-                <a:latin typeface="Pretendard"/>
-              </a:rPr>
-              <a:t>▸ </a:t>
-            </a:r>
-            <a:r>
-              <a:rPr sz="1250" b="0">
-                <a:solidFill>
-                  <a:srgbClr val="1E2933"/>
-                </a:solidFill>
-                <a:latin typeface="Pretendard"/>
-              </a:rPr>
-              <a:t>금융권 공채 · 인턴 지원</a:t>
-            </a:r>
-          </a:p>
-          <a:p>
-            <a:pPr algn="l">
-              <a:lnSpc>
-                <a:spcPct val="105000"/>
-              </a:lnSpc>
-              <a:spcBef>
-                <a:spcPts val="800"/>
-              </a:spcBef>
-            </a:pPr>
-            <a:r>
-              <a:rPr sz="1250" b="1">
-                <a:solidFill>
-                  <a:srgbClr val="7E9908"/>
-                </a:solidFill>
-                <a:latin typeface="Pretendard"/>
-              </a:rPr>
-              <a:t>▸ </a:t>
-            </a:r>
-            <a:r>
-              <a:rPr sz="1250" b="0">
-                <a:solidFill>
-                  <a:srgbClr val="1E2933"/>
-                </a:solidFill>
-                <a:latin typeface="Pretendard"/>
-              </a:rPr>
-              <a:t>현장실습 경험 정리</a:t>
-            </a:r>
-          </a:p>
-        </p:txBody>
-      </p:sp>
-      <p:sp>
-        <p:nvSpPr>
-          <p:cNvPr id="20" name="Oval 19"/>
+                  <a:srgbClr val="5B6B7B"/>
+                </a:solidFill>
+                <a:latin typeface="Pretendard"/>
+              </a:rPr>
+              <a:t>해외 마케팅 · 매출 증진 과제</a:t>
+            </a:r>
+          </a:p>
+        </p:txBody>
+      </p:sp>
+      <p:sp>
+        <p:nvSpPr>
+          <p:cNvPr id="20" name="Rounded Rectangle 19"/>
           <p:cNvSpPr/>
           <p:nvPr/>
         </p:nvSpPr>
         <p:spPr>
           <a:xfrm>
-            <a:off x="10131552" y="1874520"/>
-            <a:ext cx="512064" cy="512064"/>
-          </a:xfrm>
-          <a:prstGeom prst="ellipse">
+            <a:off x="6035040" y="4882896"/>
+            <a:ext cx="5486400" cy="960120"/>
+          </a:xfrm>
+          <a:prstGeom prst="roundRect">
             <a:avLst/>
           </a:prstGeom>
           <a:solidFill>
-            <a:srgbClr val="C6F016"/>
+            <a:srgbClr val="F4F7FB"/>
           </a:solidFill>
-          <a:ln>
-            <a:noFill/>
+          <a:ln w="12700">
+            <a:solidFill>
+              <a:srgbClr val="E2E8F0"/>
+            </a:solidFill>
           </a:ln>
           <a:effectLst/>
         </p:spPr>
@@ -9339,148 +9098,23 @@
           </a:fontRef>
         </p:style>
         <p:txBody>
-          <a:bodyPr rtlCol="0" anchor="ctr" wrap="square"/>
+          <a:bodyPr rtlCol="0" anchor="ctr"/>
           <a:lstStyle/>
           <a:p>
             <a:pPr algn="ctr"/>
-            <a:r>
-              <a:rPr sz="1800" b="1">
-                <a:solidFill>
-                  <a:srgbClr val="0F2E4F"/>
-                </a:solidFill>
-                <a:latin typeface="Pretendard"/>
-              </a:rPr>
-              <a:t>4</a:t>
-            </a:r>
-          </a:p>
-        </p:txBody>
-      </p:sp>
-      <p:sp>
-        <p:nvSpPr>
-          <p:cNvPr id="21" name="Rounded Rectangle 20"/>
-          <p:cNvSpPr/>
-          <p:nvPr/>
-        </p:nvSpPr>
-        <p:spPr>
-          <a:xfrm>
-            <a:off x="9052560" y="2514600"/>
-            <a:ext cx="2670048" cy="3063240"/>
-          </a:xfrm>
-          <a:prstGeom prst="roundRect">
-            <a:avLst/>
-          </a:prstGeom>
-          <a:solidFill>
-            <a:srgbClr val="FFFFFF"/>
-          </a:solidFill>
-          <a:ln>
-            <a:noFill/>
-          </a:ln>
-          <a:effectLst/>
-          <a:effectLst>
-            <a:outerShdw blurRad="90000" dist="38100" dir="5400000" rotWithShape="0">
-              <a:srgbClr val="1B2A3A">
-                <a:alpha val="22000"/>
-              </a:srgbClr>
-            </a:outerShdw>
-          </a:effectLst>
-        </p:spPr>
-        <p:style>
-          <a:lnRef idx="1">
-            <a:schemeClr val="accent1"/>
-          </a:lnRef>
-          <a:fillRef idx="3">
-            <a:schemeClr val="accent1"/>
-          </a:fillRef>
-          <a:effectRef idx="2">
-            <a:schemeClr val="accent1"/>
-          </a:effectRef>
-          <a:fontRef idx="minor">
-            <a:schemeClr val="lt1"/>
-          </a:fontRef>
-        </p:style>
-        <p:txBody>
-          <a:bodyPr rtlCol="0" anchor="ctr"/>
-          <a:lstStyle/>
-          <a:p>
-            <a:pPr algn="ctr"/>
-          </a:p>
-        </p:txBody>
-      </p:sp>
-      <p:sp>
-        <p:nvSpPr>
-          <p:cNvPr id="22" name="Rounded Rectangle 21"/>
-          <p:cNvSpPr/>
-          <p:nvPr/>
-        </p:nvSpPr>
-        <p:spPr>
-          <a:xfrm>
-            <a:off x="9052560" y="2514600"/>
-            <a:ext cx="2670048" cy="841248"/>
-          </a:xfrm>
-          <a:prstGeom prst="roundRect">
-            <a:avLst/>
-          </a:prstGeom>
-          <a:solidFill>
-            <a:srgbClr val="0F2E4F"/>
-          </a:solidFill>
-          <a:ln>
-            <a:noFill/>
-          </a:ln>
-          <a:effectLst/>
-        </p:spPr>
-        <p:style>
-          <a:lnRef idx="1">
-            <a:schemeClr val="accent1"/>
-          </a:lnRef>
-          <a:fillRef idx="3">
-            <a:schemeClr val="accent1"/>
-          </a:fillRef>
-          <a:effectRef idx="2">
-            <a:schemeClr val="accent1"/>
-          </a:effectRef>
-          <a:fontRef idx="minor">
-            <a:schemeClr val="lt1"/>
-          </a:fontRef>
-        </p:style>
-        <p:txBody>
-          <a:bodyPr rtlCol="0" anchor="ctr" wrap="square"/>
-          <a:lstStyle/>
-          <a:p>
-            <a:pPr algn="ctr"/>
-            <a:r>
-              <a:rPr sz="1200" b="1">
-                <a:solidFill>
-                  <a:srgbClr val="C6F016"/>
-                </a:solidFill>
-                <a:latin typeface="Pretendard"/>
-              </a:rPr>
-              <a:t>2028</a:t>
-            </a:r>
-          </a:p>
-          <a:p>
-            <a:pPr algn="ctr"/>
-            <a:r>
-              <a:rPr sz="1450" b="1">
-                <a:solidFill>
-                  <a:srgbClr val="FFFFFF"/>
-                </a:solidFill>
-                <a:latin typeface="Pretendard"/>
-              </a:rPr>
-              <a:t>금융권 입사</a:t>
-            </a:r>
-          </a:p>
-        </p:txBody>
-      </p:sp>
-      <p:sp>
-        <p:nvSpPr>
-          <p:cNvPr id="23" name="TextBox 22"/>
+          </a:p>
+        </p:txBody>
+      </p:sp>
+      <p:sp>
+        <p:nvSpPr>
+          <p:cNvPr id="21" name="TextBox 20"/>
           <p:cNvSpPr txBox="1"/>
           <p:nvPr/>
         </p:nvSpPr>
         <p:spPr>
           <a:xfrm>
-            <a:off x="9253728" y="3520440"/>
-            <a:ext cx="2286000" cy="2011680"/>
+            <a:off x="6217920" y="4956048"/>
+            <a:ext cx="5212080" cy="822960"/>
           </a:xfrm>
           <a:prstGeom prst="rect">
             <a:avLst/>
@@ -9493,87 +9127,35 @@
           </a:bodyPr>
           <a:lstStyle/>
           <a:p>
+            <a:pPr algn="l"/>
+            <a:r>
+              <a:rPr sz="1100" b="1">
+                <a:solidFill>
+                  <a:srgbClr val="7E9908"/>
+                </a:solidFill>
+                <a:latin typeface="Pretendard"/>
+              </a:rPr>
+              <a:t>배운 점</a:t>
+            </a:r>
+          </a:p>
+          <a:p>
             <a:pPr algn="l">
               <a:lnSpc>
-                <a:spcPct val="105000"/>
+                <a:spcPct val="112000"/>
               </a:lnSpc>
               <a:spcBef>
-                <a:spcPts val="800"/>
+                <a:spcPts val="300"/>
               </a:spcBef>
             </a:pPr>
             <a:r>
               <a:rPr sz="1250" b="1">
                 <a:solidFill>
-                  <a:srgbClr val="7E9908"/>
-                </a:solidFill>
-                <a:latin typeface="Pretendard"/>
-              </a:rPr>
-              <a:t>▸ </a:t>
-            </a:r>
-            <a:r>
-              <a:rPr sz="1250" b="0">
-                <a:solidFill>
                   <a:srgbClr val="1E2933"/>
                 </a:solidFill>
                 <a:latin typeface="Pretendard"/>
               </a:rPr>
-              <a:t>금융공기업 · 보험사 지원</a:t>
-            </a:r>
-          </a:p>
-          <a:p>
-            <a:pPr algn="l">
-              <a:lnSpc>
-                <a:spcPct val="105000"/>
-              </a:lnSpc>
-              <a:spcBef>
-                <a:spcPts val="800"/>
-              </a:spcBef>
-            </a:pPr>
-            <a:r>
-              <a:rPr sz="1250" b="1">
-                <a:solidFill>
-                  <a:srgbClr val="7E9908"/>
-                </a:solidFill>
-                <a:latin typeface="Pretendard"/>
-              </a:rPr>
-              <a:t>▸ </a:t>
-            </a:r>
-            <a:r>
-              <a:rPr sz="1250" b="0">
-                <a:solidFill>
-                  <a:srgbClr val="1E2933"/>
-                </a:solidFill>
-                <a:latin typeface="Pretendard"/>
-              </a:rPr>
-              <a:t>원하는 직무에서 커리어 시작</a:t>
-            </a:r>
-          </a:p>
-          <a:p>
-            <a:pPr algn="l">
-              <a:lnSpc>
-                <a:spcPct val="105000"/>
-              </a:lnSpc>
-              <a:spcBef>
-                <a:spcPts val="800"/>
-              </a:spcBef>
-            </a:pPr>
-            <a:r>
-              <a:rPr sz="1250" b="1">
-                <a:solidFill>
-                  <a:srgbClr val="7E9908"/>
-                </a:solidFill>
-                <a:latin typeface="Pretendard"/>
-              </a:rPr>
-              <a:t>▸ </a:t>
-            </a:r>
-            <a:r>
-              <a:rPr sz="1250" b="0">
-                <a:solidFill>
-                  <a:srgbClr val="1E2933"/>
-                </a:solidFill>
-                <a:latin typeface="Pretendard"/>
-              </a:rPr>
-              <a:t>입사 후에도 꾸준히 성장</a:t>
+              <a:t>자료 분석과 팀 협업으로 문제를 풀어보며
+실전 감각과 기획 역량을 기름</a:t>
             </a:r>
           </a:p>
         </p:txBody>
@@ -9722,7 +9304,7 @@
                 </a:solidFill>
                 <a:latin typeface="Pretendard"/>
               </a:rPr>
-              <a:t>LINKAGE  ·  활동과 목표의 연결</a:t>
+              <a:t>ROADMAP  ·  앞으로의 계획</a:t>
             </a:r>
           </a:p>
         </p:txBody>
@@ -9757,7 +9339,7 @@
                 </a:solidFill>
                 <a:latin typeface="Pretendard"/>
               </a:rPr>
-              <a:t>활동 - 역량 - 목표</a:t>
+              <a:t>목표 달성 로드맵</a:t>
             </a:r>
           </a:p>
         </p:txBody>
@@ -9811,6 +9393,1391 @@
                 <a:latin typeface="Pretendard"/>
               </a:rPr>
               <a:t>07</a:t>
+            </a:r>
+          </a:p>
+        </p:txBody>
+      </p:sp>
+      <p:sp>
+        <p:nvSpPr>
+          <p:cNvPr id="7" name="Rectangle 6"/>
+          <p:cNvSpPr/>
+          <p:nvPr/>
+        </p:nvSpPr>
+        <p:spPr>
+          <a:xfrm>
+            <a:off x="731520" y="2148840"/>
+            <a:ext cx="10561320" cy="38100"/>
+          </a:xfrm>
+          <a:prstGeom prst="rect">
+            <a:avLst/>
+          </a:prstGeom>
+          <a:solidFill>
+            <a:srgbClr val="1B446E"/>
+          </a:solidFill>
+          <a:ln>
+            <a:noFill/>
+          </a:ln>
+          <a:effectLst/>
+        </p:spPr>
+        <p:style>
+          <a:lnRef idx="1">
+            <a:schemeClr val="accent1"/>
+          </a:lnRef>
+          <a:fillRef idx="3">
+            <a:schemeClr val="accent1"/>
+          </a:fillRef>
+          <a:effectRef idx="2">
+            <a:schemeClr val="accent1"/>
+          </a:effectRef>
+          <a:fontRef idx="minor">
+            <a:schemeClr val="lt1"/>
+          </a:fontRef>
+        </p:style>
+        <p:txBody>
+          <a:bodyPr rtlCol="0" anchor="ctr"/>
+          <a:lstStyle/>
+          <a:p>
+            <a:pPr algn="ctr"/>
+          </a:p>
+        </p:txBody>
+      </p:sp>
+      <p:sp>
+        <p:nvSpPr>
+          <p:cNvPr id="8" name="Oval 7"/>
+          <p:cNvSpPr/>
+          <p:nvPr/>
+        </p:nvSpPr>
+        <p:spPr>
+          <a:xfrm>
+            <a:off x="1627632" y="1874520"/>
+            <a:ext cx="512064" cy="512064"/>
+          </a:xfrm>
+          <a:prstGeom prst="ellipse">
+            <a:avLst/>
+          </a:prstGeom>
+          <a:solidFill>
+            <a:srgbClr val="C6F016"/>
+          </a:solidFill>
+          <a:ln>
+            <a:noFill/>
+          </a:ln>
+          <a:effectLst/>
+        </p:spPr>
+        <p:style>
+          <a:lnRef idx="1">
+            <a:schemeClr val="accent1"/>
+          </a:lnRef>
+          <a:fillRef idx="3">
+            <a:schemeClr val="accent1"/>
+          </a:fillRef>
+          <a:effectRef idx="2">
+            <a:schemeClr val="accent1"/>
+          </a:effectRef>
+          <a:fontRef idx="minor">
+            <a:schemeClr val="lt1"/>
+          </a:fontRef>
+        </p:style>
+        <p:txBody>
+          <a:bodyPr rtlCol="0" anchor="ctr" wrap="square"/>
+          <a:lstStyle/>
+          <a:p>
+            <a:pPr algn="ctr"/>
+            <a:r>
+              <a:rPr sz="1800" b="1">
+                <a:solidFill>
+                  <a:srgbClr val="0F2E4F"/>
+                </a:solidFill>
+                <a:latin typeface="Pretendard"/>
+              </a:rPr>
+              <a:t>1</a:t>
+            </a:r>
+          </a:p>
+        </p:txBody>
+      </p:sp>
+      <p:sp>
+        <p:nvSpPr>
+          <p:cNvPr id="9" name="Rounded Rectangle 8"/>
+          <p:cNvSpPr/>
+          <p:nvPr/>
+        </p:nvSpPr>
+        <p:spPr>
+          <a:xfrm>
+            <a:off x="548640" y="2514600"/>
+            <a:ext cx="2670048" cy="3063240"/>
+          </a:xfrm>
+          <a:prstGeom prst="roundRect">
+            <a:avLst/>
+          </a:prstGeom>
+          <a:solidFill>
+            <a:srgbClr val="FFFFFF"/>
+          </a:solidFill>
+          <a:ln>
+            <a:noFill/>
+          </a:ln>
+          <a:effectLst/>
+          <a:effectLst>
+            <a:outerShdw blurRad="90000" dist="38100" dir="5400000" rotWithShape="0">
+              <a:srgbClr val="1B2A3A">
+                <a:alpha val="22000"/>
+              </a:srgbClr>
+            </a:outerShdw>
+          </a:effectLst>
+        </p:spPr>
+        <p:style>
+          <a:lnRef idx="1">
+            <a:schemeClr val="accent1"/>
+          </a:lnRef>
+          <a:fillRef idx="3">
+            <a:schemeClr val="accent1"/>
+          </a:fillRef>
+          <a:effectRef idx="2">
+            <a:schemeClr val="accent1"/>
+          </a:effectRef>
+          <a:fontRef idx="minor">
+            <a:schemeClr val="lt1"/>
+          </a:fontRef>
+        </p:style>
+        <p:txBody>
+          <a:bodyPr rtlCol="0" anchor="ctr"/>
+          <a:lstStyle/>
+          <a:p>
+            <a:pPr algn="ctr"/>
+          </a:p>
+        </p:txBody>
+      </p:sp>
+      <p:sp>
+        <p:nvSpPr>
+          <p:cNvPr id="10" name="Rounded Rectangle 9"/>
+          <p:cNvSpPr/>
+          <p:nvPr/>
+        </p:nvSpPr>
+        <p:spPr>
+          <a:xfrm>
+            <a:off x="548640" y="2514600"/>
+            <a:ext cx="2670048" cy="841248"/>
+          </a:xfrm>
+          <a:prstGeom prst="roundRect">
+            <a:avLst/>
+          </a:prstGeom>
+          <a:solidFill>
+            <a:srgbClr val="0F2E4F"/>
+          </a:solidFill>
+          <a:ln>
+            <a:noFill/>
+          </a:ln>
+          <a:effectLst/>
+        </p:spPr>
+        <p:style>
+          <a:lnRef idx="1">
+            <a:schemeClr val="accent1"/>
+          </a:lnRef>
+          <a:fillRef idx="3">
+            <a:schemeClr val="accent1"/>
+          </a:fillRef>
+          <a:effectRef idx="2">
+            <a:schemeClr val="accent1"/>
+          </a:effectRef>
+          <a:fontRef idx="minor">
+            <a:schemeClr val="lt1"/>
+          </a:fontRef>
+        </p:style>
+        <p:txBody>
+          <a:bodyPr rtlCol="0" anchor="ctr" wrap="square"/>
+          <a:lstStyle/>
+          <a:p>
+            <a:pPr algn="ctr"/>
+            <a:r>
+              <a:rPr sz="1200" b="1">
+                <a:solidFill>
+                  <a:srgbClr val="C6F016"/>
+                </a:solidFill>
+                <a:latin typeface="Pretendard"/>
+              </a:rPr>
+              <a:t>2026 하반기</a:t>
+            </a:r>
+          </a:p>
+          <a:p>
+            <a:pPr algn="ctr"/>
+            <a:r>
+              <a:rPr sz="1450" b="1">
+                <a:solidFill>
+                  <a:srgbClr val="FFFFFF"/>
+                </a:solidFill>
+                <a:latin typeface="Pretendard"/>
+              </a:rPr>
+              <a:t>현장실습 (인턴십)</a:t>
+            </a:r>
+          </a:p>
+        </p:txBody>
+      </p:sp>
+      <p:sp>
+        <p:nvSpPr>
+          <p:cNvPr id="11" name="TextBox 10"/>
+          <p:cNvSpPr txBox="1"/>
+          <p:nvPr/>
+        </p:nvSpPr>
+        <p:spPr>
+          <a:xfrm>
+            <a:off x="749808" y="3520440"/>
+            <a:ext cx="2286000" cy="2011680"/>
+          </a:xfrm>
+          <a:prstGeom prst="rect">
+            <a:avLst/>
+          </a:prstGeom>
+          <a:noFill/>
+        </p:spPr>
+        <p:txBody>
+          <a:bodyPr wrap="square" anchor="t" lIns="25400" rIns="25400" tIns="25400" bIns="25400">
+            <a:spAutoFit/>
+          </a:bodyPr>
+          <a:lstStyle/>
+          <a:p>
+            <a:pPr algn="l">
+              <a:lnSpc>
+                <a:spcPct val="105000"/>
+              </a:lnSpc>
+              <a:spcBef>
+                <a:spcPts val="800"/>
+              </a:spcBef>
+            </a:pPr>
+            <a:r>
+              <a:rPr sz="1250" b="1">
+                <a:solidFill>
+                  <a:srgbClr val="7E9908"/>
+                </a:solidFill>
+                <a:latin typeface="Pretendard"/>
+              </a:rPr>
+              <a:t>▸ </a:t>
+            </a:r>
+            <a:r>
+              <a:rPr sz="1250" b="0">
+                <a:solidFill>
+                  <a:srgbClr val="1E2933"/>
+                </a:solidFill>
+                <a:latin typeface="Pretendard"/>
+              </a:rPr>
+              <a:t>금융권 현장실습 참여</a:t>
+            </a:r>
+          </a:p>
+          <a:p>
+            <a:pPr algn="l">
+              <a:lnSpc>
+                <a:spcPct val="105000"/>
+              </a:lnSpc>
+              <a:spcBef>
+                <a:spcPts val="800"/>
+              </a:spcBef>
+            </a:pPr>
+            <a:r>
+              <a:rPr sz="1250" b="1">
+                <a:solidFill>
+                  <a:srgbClr val="7E9908"/>
+                </a:solidFill>
+                <a:latin typeface="Pretendard"/>
+              </a:rPr>
+              <a:t>▸ </a:t>
+            </a:r>
+            <a:r>
+              <a:rPr sz="1250" b="0">
+                <a:solidFill>
+                  <a:srgbClr val="1E2933"/>
+                </a:solidFill>
+                <a:latin typeface="Pretendard"/>
+              </a:rPr>
+              <a:t>실무와 직무를 직접 경험</a:t>
+            </a:r>
+          </a:p>
+          <a:p>
+            <a:pPr algn="l">
+              <a:lnSpc>
+                <a:spcPct val="105000"/>
+              </a:lnSpc>
+              <a:spcBef>
+                <a:spcPts val="800"/>
+              </a:spcBef>
+            </a:pPr>
+            <a:r>
+              <a:rPr sz="1250" b="1">
+                <a:solidFill>
+                  <a:srgbClr val="7E9908"/>
+                </a:solidFill>
+                <a:latin typeface="Pretendard"/>
+              </a:rPr>
+              <a:t>▸ </a:t>
+            </a:r>
+            <a:r>
+              <a:rPr sz="1250" b="0">
+                <a:solidFill>
+                  <a:srgbClr val="1E2933"/>
+                </a:solidFill>
+                <a:latin typeface="Pretendard"/>
+              </a:rPr>
+              <a:t>현업 분위기 · 일 익히기</a:t>
+            </a:r>
+          </a:p>
+        </p:txBody>
+      </p:sp>
+      <p:sp>
+        <p:nvSpPr>
+          <p:cNvPr id="12" name="Oval 11"/>
+          <p:cNvSpPr/>
+          <p:nvPr/>
+        </p:nvSpPr>
+        <p:spPr>
+          <a:xfrm>
+            <a:off x="4462272" y="1874520"/>
+            <a:ext cx="512064" cy="512064"/>
+          </a:xfrm>
+          <a:prstGeom prst="ellipse">
+            <a:avLst/>
+          </a:prstGeom>
+          <a:solidFill>
+            <a:srgbClr val="C6F016"/>
+          </a:solidFill>
+          <a:ln>
+            <a:noFill/>
+          </a:ln>
+          <a:effectLst/>
+        </p:spPr>
+        <p:style>
+          <a:lnRef idx="1">
+            <a:schemeClr val="accent1"/>
+          </a:lnRef>
+          <a:fillRef idx="3">
+            <a:schemeClr val="accent1"/>
+          </a:fillRef>
+          <a:effectRef idx="2">
+            <a:schemeClr val="accent1"/>
+          </a:effectRef>
+          <a:fontRef idx="minor">
+            <a:schemeClr val="lt1"/>
+          </a:fontRef>
+        </p:style>
+        <p:txBody>
+          <a:bodyPr rtlCol="0" anchor="ctr" wrap="square"/>
+          <a:lstStyle/>
+          <a:p>
+            <a:pPr algn="ctr"/>
+            <a:r>
+              <a:rPr sz="1800" b="1">
+                <a:solidFill>
+                  <a:srgbClr val="0F2E4F"/>
+                </a:solidFill>
+                <a:latin typeface="Pretendard"/>
+              </a:rPr>
+              <a:t>2</a:t>
+            </a:r>
+          </a:p>
+        </p:txBody>
+      </p:sp>
+      <p:sp>
+        <p:nvSpPr>
+          <p:cNvPr id="13" name="Rounded Rectangle 12"/>
+          <p:cNvSpPr/>
+          <p:nvPr/>
+        </p:nvSpPr>
+        <p:spPr>
+          <a:xfrm>
+            <a:off x="3383280" y="2514600"/>
+            <a:ext cx="2670048" cy="3063240"/>
+          </a:xfrm>
+          <a:prstGeom prst="roundRect">
+            <a:avLst/>
+          </a:prstGeom>
+          <a:solidFill>
+            <a:srgbClr val="FFFFFF"/>
+          </a:solidFill>
+          <a:ln>
+            <a:noFill/>
+          </a:ln>
+          <a:effectLst/>
+          <a:effectLst>
+            <a:outerShdw blurRad="90000" dist="38100" dir="5400000" rotWithShape="0">
+              <a:srgbClr val="1B2A3A">
+                <a:alpha val="22000"/>
+              </a:srgbClr>
+            </a:outerShdw>
+          </a:effectLst>
+        </p:spPr>
+        <p:style>
+          <a:lnRef idx="1">
+            <a:schemeClr val="accent1"/>
+          </a:lnRef>
+          <a:fillRef idx="3">
+            <a:schemeClr val="accent1"/>
+          </a:fillRef>
+          <a:effectRef idx="2">
+            <a:schemeClr val="accent1"/>
+          </a:effectRef>
+          <a:fontRef idx="minor">
+            <a:schemeClr val="lt1"/>
+          </a:fontRef>
+        </p:style>
+        <p:txBody>
+          <a:bodyPr rtlCol="0" anchor="ctr"/>
+          <a:lstStyle/>
+          <a:p>
+            <a:pPr algn="ctr"/>
+          </a:p>
+        </p:txBody>
+      </p:sp>
+      <p:sp>
+        <p:nvSpPr>
+          <p:cNvPr id="14" name="Rounded Rectangle 13"/>
+          <p:cNvSpPr/>
+          <p:nvPr/>
+        </p:nvSpPr>
+        <p:spPr>
+          <a:xfrm>
+            <a:off x="3383280" y="2514600"/>
+            <a:ext cx="2670048" cy="841248"/>
+          </a:xfrm>
+          <a:prstGeom prst="roundRect">
+            <a:avLst/>
+          </a:prstGeom>
+          <a:solidFill>
+            <a:srgbClr val="0F2E4F"/>
+          </a:solidFill>
+          <a:ln>
+            <a:noFill/>
+          </a:ln>
+          <a:effectLst/>
+        </p:spPr>
+        <p:style>
+          <a:lnRef idx="1">
+            <a:schemeClr val="accent1"/>
+          </a:lnRef>
+          <a:fillRef idx="3">
+            <a:schemeClr val="accent1"/>
+          </a:fillRef>
+          <a:effectRef idx="2">
+            <a:schemeClr val="accent1"/>
+          </a:effectRef>
+          <a:fontRef idx="minor">
+            <a:schemeClr val="lt1"/>
+          </a:fontRef>
+        </p:style>
+        <p:txBody>
+          <a:bodyPr rtlCol="0" anchor="ctr" wrap="square"/>
+          <a:lstStyle/>
+          <a:p>
+            <a:pPr algn="ctr"/>
+            <a:r>
+              <a:rPr sz="1200" b="1">
+                <a:solidFill>
+                  <a:srgbClr val="C6F016"/>
+                </a:solidFill>
+                <a:latin typeface="Pretendard"/>
+              </a:rPr>
+              <a:t>2027 상반기</a:t>
+            </a:r>
+          </a:p>
+          <a:p>
+            <a:pPr algn="ctr"/>
+            <a:r>
+              <a:rPr sz="1450" b="1">
+                <a:solidFill>
+                  <a:srgbClr val="FFFFFF"/>
+                </a:solidFill>
+                <a:latin typeface="Pretendard"/>
+              </a:rPr>
+              <a:t>역량 다지기</a:t>
+            </a:r>
+          </a:p>
+        </p:txBody>
+      </p:sp>
+      <p:sp>
+        <p:nvSpPr>
+          <p:cNvPr id="15" name="TextBox 14"/>
+          <p:cNvSpPr txBox="1"/>
+          <p:nvPr/>
+        </p:nvSpPr>
+        <p:spPr>
+          <a:xfrm>
+            <a:off x="3584448" y="3520440"/>
+            <a:ext cx="2286000" cy="2011680"/>
+          </a:xfrm>
+          <a:prstGeom prst="rect">
+            <a:avLst/>
+          </a:prstGeom>
+          <a:noFill/>
+        </p:spPr>
+        <p:txBody>
+          <a:bodyPr wrap="square" anchor="t" lIns="25400" rIns="25400" tIns="25400" bIns="25400">
+            <a:spAutoFit/>
+          </a:bodyPr>
+          <a:lstStyle/>
+          <a:p>
+            <a:pPr algn="l">
+              <a:lnSpc>
+                <a:spcPct val="105000"/>
+              </a:lnSpc>
+              <a:spcBef>
+                <a:spcPts val="800"/>
+              </a:spcBef>
+            </a:pPr>
+            <a:r>
+              <a:rPr sz="1250" b="1">
+                <a:solidFill>
+                  <a:srgbClr val="7E9908"/>
+                </a:solidFill>
+                <a:latin typeface="Pretendard"/>
+              </a:rPr>
+              <a:t>▸ </a:t>
+            </a:r>
+            <a:r>
+              <a:rPr sz="1250" b="0">
+                <a:solidFill>
+                  <a:srgbClr val="1E2933"/>
+                </a:solidFill>
+                <a:latin typeface="Pretendard"/>
+              </a:rPr>
+              <a:t>관련 자격증 준비</a:t>
+            </a:r>
+          </a:p>
+          <a:p>
+            <a:pPr algn="l">
+              <a:lnSpc>
+                <a:spcPct val="105000"/>
+              </a:lnSpc>
+              <a:spcBef>
+                <a:spcPts val="800"/>
+              </a:spcBef>
+            </a:pPr>
+            <a:r>
+              <a:rPr sz="1250" b="1">
+                <a:solidFill>
+                  <a:srgbClr val="7E9908"/>
+                </a:solidFill>
+                <a:latin typeface="Pretendard"/>
+              </a:rPr>
+              <a:t>▸ </a:t>
+            </a:r>
+            <a:r>
+              <a:rPr sz="1250" b="0">
+                <a:solidFill>
+                  <a:srgbClr val="1E2933"/>
+                </a:solidFill>
+                <a:latin typeface="Pretendard"/>
+              </a:rPr>
+              <a:t>보험 · 재무 전공 심화</a:t>
+            </a:r>
+          </a:p>
+          <a:p>
+            <a:pPr algn="l">
+              <a:lnSpc>
+                <a:spcPct val="105000"/>
+              </a:lnSpc>
+              <a:spcBef>
+                <a:spcPts val="800"/>
+              </a:spcBef>
+            </a:pPr>
+            <a:r>
+              <a:rPr sz="1250" b="1">
+                <a:solidFill>
+                  <a:srgbClr val="7E9908"/>
+                </a:solidFill>
+                <a:latin typeface="Pretendard"/>
+              </a:rPr>
+              <a:t>▸ </a:t>
+            </a:r>
+            <a:r>
+              <a:rPr sz="1250" b="0">
+                <a:solidFill>
+                  <a:srgbClr val="1E2933"/>
+                </a:solidFill>
+                <a:latin typeface="Pretendard"/>
+              </a:rPr>
+              <a:t>자료 분석 역량 학습</a:t>
+            </a:r>
+          </a:p>
+        </p:txBody>
+      </p:sp>
+      <p:sp>
+        <p:nvSpPr>
+          <p:cNvPr id="16" name="Oval 15"/>
+          <p:cNvSpPr/>
+          <p:nvPr/>
+        </p:nvSpPr>
+        <p:spPr>
+          <a:xfrm>
+            <a:off x="7296912" y="1874520"/>
+            <a:ext cx="512064" cy="512064"/>
+          </a:xfrm>
+          <a:prstGeom prst="ellipse">
+            <a:avLst/>
+          </a:prstGeom>
+          <a:solidFill>
+            <a:srgbClr val="C6F016"/>
+          </a:solidFill>
+          <a:ln>
+            <a:noFill/>
+          </a:ln>
+          <a:effectLst/>
+        </p:spPr>
+        <p:style>
+          <a:lnRef idx="1">
+            <a:schemeClr val="accent1"/>
+          </a:lnRef>
+          <a:fillRef idx="3">
+            <a:schemeClr val="accent1"/>
+          </a:fillRef>
+          <a:effectRef idx="2">
+            <a:schemeClr val="accent1"/>
+          </a:effectRef>
+          <a:fontRef idx="minor">
+            <a:schemeClr val="lt1"/>
+          </a:fontRef>
+        </p:style>
+        <p:txBody>
+          <a:bodyPr rtlCol="0" anchor="ctr" wrap="square"/>
+          <a:lstStyle/>
+          <a:p>
+            <a:pPr algn="ctr"/>
+            <a:r>
+              <a:rPr sz="1800" b="1">
+                <a:solidFill>
+                  <a:srgbClr val="0F2E4F"/>
+                </a:solidFill>
+                <a:latin typeface="Pretendard"/>
+              </a:rPr>
+              <a:t>3</a:t>
+            </a:r>
+          </a:p>
+        </p:txBody>
+      </p:sp>
+      <p:sp>
+        <p:nvSpPr>
+          <p:cNvPr id="17" name="Rounded Rectangle 16"/>
+          <p:cNvSpPr/>
+          <p:nvPr/>
+        </p:nvSpPr>
+        <p:spPr>
+          <a:xfrm>
+            <a:off x="6217920" y="2514600"/>
+            <a:ext cx="2670048" cy="3063240"/>
+          </a:xfrm>
+          <a:prstGeom prst="roundRect">
+            <a:avLst/>
+          </a:prstGeom>
+          <a:solidFill>
+            <a:srgbClr val="FFFFFF"/>
+          </a:solidFill>
+          <a:ln>
+            <a:noFill/>
+          </a:ln>
+          <a:effectLst/>
+          <a:effectLst>
+            <a:outerShdw blurRad="90000" dist="38100" dir="5400000" rotWithShape="0">
+              <a:srgbClr val="1B2A3A">
+                <a:alpha val="22000"/>
+              </a:srgbClr>
+            </a:outerShdw>
+          </a:effectLst>
+        </p:spPr>
+        <p:style>
+          <a:lnRef idx="1">
+            <a:schemeClr val="accent1"/>
+          </a:lnRef>
+          <a:fillRef idx="3">
+            <a:schemeClr val="accent1"/>
+          </a:fillRef>
+          <a:effectRef idx="2">
+            <a:schemeClr val="accent1"/>
+          </a:effectRef>
+          <a:fontRef idx="minor">
+            <a:schemeClr val="lt1"/>
+          </a:fontRef>
+        </p:style>
+        <p:txBody>
+          <a:bodyPr rtlCol="0" anchor="ctr"/>
+          <a:lstStyle/>
+          <a:p>
+            <a:pPr algn="ctr"/>
+          </a:p>
+        </p:txBody>
+      </p:sp>
+      <p:sp>
+        <p:nvSpPr>
+          <p:cNvPr id="18" name="Rounded Rectangle 17"/>
+          <p:cNvSpPr/>
+          <p:nvPr/>
+        </p:nvSpPr>
+        <p:spPr>
+          <a:xfrm>
+            <a:off x="6217920" y="2514600"/>
+            <a:ext cx="2670048" cy="841248"/>
+          </a:xfrm>
+          <a:prstGeom prst="roundRect">
+            <a:avLst/>
+          </a:prstGeom>
+          <a:solidFill>
+            <a:srgbClr val="0F2E4F"/>
+          </a:solidFill>
+          <a:ln>
+            <a:noFill/>
+          </a:ln>
+          <a:effectLst/>
+        </p:spPr>
+        <p:style>
+          <a:lnRef idx="1">
+            <a:schemeClr val="accent1"/>
+          </a:lnRef>
+          <a:fillRef idx="3">
+            <a:schemeClr val="accent1"/>
+          </a:fillRef>
+          <a:effectRef idx="2">
+            <a:schemeClr val="accent1"/>
+          </a:effectRef>
+          <a:fontRef idx="minor">
+            <a:schemeClr val="lt1"/>
+          </a:fontRef>
+        </p:style>
+        <p:txBody>
+          <a:bodyPr rtlCol="0" anchor="ctr" wrap="square"/>
+          <a:lstStyle/>
+          <a:p>
+            <a:pPr algn="ctr"/>
+            <a:r>
+              <a:rPr sz="1200" b="1">
+                <a:solidFill>
+                  <a:srgbClr val="C6F016"/>
+                </a:solidFill>
+                <a:latin typeface="Pretendard"/>
+              </a:rPr>
+              <a:t>2027 하반기</a:t>
+            </a:r>
+          </a:p>
+          <a:p>
+            <a:pPr algn="ctr"/>
+            <a:r>
+              <a:rPr sz="1450" b="1">
+                <a:solidFill>
+                  <a:srgbClr val="FFFFFF"/>
+                </a:solidFill>
+                <a:latin typeface="Pretendard"/>
+              </a:rPr>
+              <a:t>취업 준비 집중</a:t>
+            </a:r>
+          </a:p>
+        </p:txBody>
+      </p:sp>
+      <p:sp>
+        <p:nvSpPr>
+          <p:cNvPr id="19" name="TextBox 18"/>
+          <p:cNvSpPr txBox="1"/>
+          <p:nvPr/>
+        </p:nvSpPr>
+        <p:spPr>
+          <a:xfrm>
+            <a:off x="6419088" y="3520440"/>
+            <a:ext cx="2286000" cy="2011680"/>
+          </a:xfrm>
+          <a:prstGeom prst="rect">
+            <a:avLst/>
+          </a:prstGeom>
+          <a:noFill/>
+        </p:spPr>
+        <p:txBody>
+          <a:bodyPr wrap="square" anchor="t" lIns="25400" rIns="25400" tIns="25400" bIns="25400">
+            <a:spAutoFit/>
+          </a:bodyPr>
+          <a:lstStyle/>
+          <a:p>
+            <a:pPr algn="l">
+              <a:lnSpc>
+                <a:spcPct val="105000"/>
+              </a:lnSpc>
+              <a:spcBef>
+                <a:spcPts val="800"/>
+              </a:spcBef>
+            </a:pPr>
+            <a:r>
+              <a:rPr sz="1250" b="1">
+                <a:solidFill>
+                  <a:srgbClr val="7E9908"/>
+                </a:solidFill>
+                <a:latin typeface="Pretendard"/>
+              </a:rPr>
+              <a:t>▸ </a:t>
+            </a:r>
+            <a:r>
+              <a:rPr sz="1250" b="0">
+                <a:solidFill>
+                  <a:srgbClr val="1E2933"/>
+                </a:solidFill>
+                <a:latin typeface="Pretendard"/>
+              </a:rPr>
+              <a:t>자기소개서 · 포트폴리오 정리</a:t>
+            </a:r>
+          </a:p>
+          <a:p>
+            <a:pPr algn="l">
+              <a:lnSpc>
+                <a:spcPct val="105000"/>
+              </a:lnSpc>
+              <a:spcBef>
+                <a:spcPts val="800"/>
+              </a:spcBef>
+            </a:pPr>
+            <a:r>
+              <a:rPr sz="1250" b="1">
+                <a:solidFill>
+                  <a:srgbClr val="7E9908"/>
+                </a:solidFill>
+                <a:latin typeface="Pretendard"/>
+              </a:rPr>
+              <a:t>▸ </a:t>
+            </a:r>
+            <a:r>
+              <a:rPr sz="1250" b="0">
+                <a:solidFill>
+                  <a:srgbClr val="1E2933"/>
+                </a:solidFill>
+                <a:latin typeface="Pretendard"/>
+              </a:rPr>
+              <a:t>금융권 공채 · 인턴 지원</a:t>
+            </a:r>
+          </a:p>
+          <a:p>
+            <a:pPr algn="l">
+              <a:lnSpc>
+                <a:spcPct val="105000"/>
+              </a:lnSpc>
+              <a:spcBef>
+                <a:spcPts val="800"/>
+              </a:spcBef>
+            </a:pPr>
+            <a:r>
+              <a:rPr sz="1250" b="1">
+                <a:solidFill>
+                  <a:srgbClr val="7E9908"/>
+                </a:solidFill>
+                <a:latin typeface="Pretendard"/>
+              </a:rPr>
+              <a:t>▸ </a:t>
+            </a:r>
+            <a:r>
+              <a:rPr sz="1250" b="0">
+                <a:solidFill>
+                  <a:srgbClr val="1E2933"/>
+                </a:solidFill>
+                <a:latin typeface="Pretendard"/>
+              </a:rPr>
+              <a:t>현장실습 경험 정리</a:t>
+            </a:r>
+          </a:p>
+        </p:txBody>
+      </p:sp>
+      <p:sp>
+        <p:nvSpPr>
+          <p:cNvPr id="20" name="Oval 19"/>
+          <p:cNvSpPr/>
+          <p:nvPr/>
+        </p:nvSpPr>
+        <p:spPr>
+          <a:xfrm>
+            <a:off x="10131552" y="1874520"/>
+            <a:ext cx="512064" cy="512064"/>
+          </a:xfrm>
+          <a:prstGeom prst="ellipse">
+            <a:avLst/>
+          </a:prstGeom>
+          <a:solidFill>
+            <a:srgbClr val="C6F016"/>
+          </a:solidFill>
+          <a:ln>
+            <a:noFill/>
+          </a:ln>
+          <a:effectLst/>
+        </p:spPr>
+        <p:style>
+          <a:lnRef idx="1">
+            <a:schemeClr val="accent1"/>
+          </a:lnRef>
+          <a:fillRef idx="3">
+            <a:schemeClr val="accent1"/>
+          </a:fillRef>
+          <a:effectRef idx="2">
+            <a:schemeClr val="accent1"/>
+          </a:effectRef>
+          <a:fontRef idx="minor">
+            <a:schemeClr val="lt1"/>
+          </a:fontRef>
+        </p:style>
+        <p:txBody>
+          <a:bodyPr rtlCol="0" anchor="ctr" wrap="square"/>
+          <a:lstStyle/>
+          <a:p>
+            <a:pPr algn="ctr"/>
+            <a:r>
+              <a:rPr sz="1800" b="1">
+                <a:solidFill>
+                  <a:srgbClr val="0F2E4F"/>
+                </a:solidFill>
+                <a:latin typeface="Pretendard"/>
+              </a:rPr>
+              <a:t>4</a:t>
+            </a:r>
+          </a:p>
+        </p:txBody>
+      </p:sp>
+      <p:sp>
+        <p:nvSpPr>
+          <p:cNvPr id="21" name="Rounded Rectangle 20"/>
+          <p:cNvSpPr/>
+          <p:nvPr/>
+        </p:nvSpPr>
+        <p:spPr>
+          <a:xfrm>
+            <a:off x="9052560" y="2514600"/>
+            <a:ext cx="2670048" cy="3063240"/>
+          </a:xfrm>
+          <a:prstGeom prst="roundRect">
+            <a:avLst/>
+          </a:prstGeom>
+          <a:solidFill>
+            <a:srgbClr val="FFFFFF"/>
+          </a:solidFill>
+          <a:ln>
+            <a:noFill/>
+          </a:ln>
+          <a:effectLst/>
+          <a:effectLst>
+            <a:outerShdw blurRad="90000" dist="38100" dir="5400000" rotWithShape="0">
+              <a:srgbClr val="1B2A3A">
+                <a:alpha val="22000"/>
+              </a:srgbClr>
+            </a:outerShdw>
+          </a:effectLst>
+        </p:spPr>
+        <p:style>
+          <a:lnRef idx="1">
+            <a:schemeClr val="accent1"/>
+          </a:lnRef>
+          <a:fillRef idx="3">
+            <a:schemeClr val="accent1"/>
+          </a:fillRef>
+          <a:effectRef idx="2">
+            <a:schemeClr val="accent1"/>
+          </a:effectRef>
+          <a:fontRef idx="minor">
+            <a:schemeClr val="lt1"/>
+          </a:fontRef>
+        </p:style>
+        <p:txBody>
+          <a:bodyPr rtlCol="0" anchor="ctr"/>
+          <a:lstStyle/>
+          <a:p>
+            <a:pPr algn="ctr"/>
+          </a:p>
+        </p:txBody>
+      </p:sp>
+      <p:sp>
+        <p:nvSpPr>
+          <p:cNvPr id="22" name="Rounded Rectangle 21"/>
+          <p:cNvSpPr/>
+          <p:nvPr/>
+        </p:nvSpPr>
+        <p:spPr>
+          <a:xfrm>
+            <a:off x="9052560" y="2514600"/>
+            <a:ext cx="2670048" cy="841248"/>
+          </a:xfrm>
+          <a:prstGeom prst="roundRect">
+            <a:avLst/>
+          </a:prstGeom>
+          <a:solidFill>
+            <a:srgbClr val="0F2E4F"/>
+          </a:solidFill>
+          <a:ln>
+            <a:noFill/>
+          </a:ln>
+          <a:effectLst/>
+        </p:spPr>
+        <p:style>
+          <a:lnRef idx="1">
+            <a:schemeClr val="accent1"/>
+          </a:lnRef>
+          <a:fillRef idx="3">
+            <a:schemeClr val="accent1"/>
+          </a:fillRef>
+          <a:effectRef idx="2">
+            <a:schemeClr val="accent1"/>
+          </a:effectRef>
+          <a:fontRef idx="minor">
+            <a:schemeClr val="lt1"/>
+          </a:fontRef>
+        </p:style>
+        <p:txBody>
+          <a:bodyPr rtlCol="0" anchor="ctr" wrap="square"/>
+          <a:lstStyle/>
+          <a:p>
+            <a:pPr algn="ctr"/>
+            <a:r>
+              <a:rPr sz="1200" b="1">
+                <a:solidFill>
+                  <a:srgbClr val="C6F016"/>
+                </a:solidFill>
+                <a:latin typeface="Pretendard"/>
+              </a:rPr>
+              <a:t>2028</a:t>
+            </a:r>
+          </a:p>
+          <a:p>
+            <a:pPr algn="ctr"/>
+            <a:r>
+              <a:rPr sz="1450" b="1">
+                <a:solidFill>
+                  <a:srgbClr val="FFFFFF"/>
+                </a:solidFill>
+                <a:latin typeface="Pretendard"/>
+              </a:rPr>
+              <a:t>금융권 입사</a:t>
+            </a:r>
+          </a:p>
+        </p:txBody>
+      </p:sp>
+      <p:sp>
+        <p:nvSpPr>
+          <p:cNvPr id="23" name="TextBox 22"/>
+          <p:cNvSpPr txBox="1"/>
+          <p:nvPr/>
+        </p:nvSpPr>
+        <p:spPr>
+          <a:xfrm>
+            <a:off x="9253728" y="3520440"/>
+            <a:ext cx="2286000" cy="2011680"/>
+          </a:xfrm>
+          <a:prstGeom prst="rect">
+            <a:avLst/>
+          </a:prstGeom>
+          <a:noFill/>
+        </p:spPr>
+        <p:txBody>
+          <a:bodyPr wrap="square" anchor="t" lIns="25400" rIns="25400" tIns="25400" bIns="25400">
+            <a:spAutoFit/>
+          </a:bodyPr>
+          <a:lstStyle/>
+          <a:p>
+            <a:pPr algn="l">
+              <a:lnSpc>
+                <a:spcPct val="105000"/>
+              </a:lnSpc>
+              <a:spcBef>
+                <a:spcPts val="800"/>
+              </a:spcBef>
+            </a:pPr>
+            <a:r>
+              <a:rPr sz="1250" b="1">
+                <a:solidFill>
+                  <a:srgbClr val="7E9908"/>
+                </a:solidFill>
+                <a:latin typeface="Pretendard"/>
+              </a:rPr>
+              <a:t>▸ </a:t>
+            </a:r>
+            <a:r>
+              <a:rPr sz="1250" b="0">
+                <a:solidFill>
+                  <a:srgbClr val="1E2933"/>
+                </a:solidFill>
+                <a:latin typeface="Pretendard"/>
+              </a:rPr>
+              <a:t>금융공기업 · 보험사 지원</a:t>
+            </a:r>
+          </a:p>
+          <a:p>
+            <a:pPr algn="l">
+              <a:lnSpc>
+                <a:spcPct val="105000"/>
+              </a:lnSpc>
+              <a:spcBef>
+                <a:spcPts val="800"/>
+              </a:spcBef>
+            </a:pPr>
+            <a:r>
+              <a:rPr sz="1250" b="1">
+                <a:solidFill>
+                  <a:srgbClr val="7E9908"/>
+                </a:solidFill>
+                <a:latin typeface="Pretendard"/>
+              </a:rPr>
+              <a:t>▸ </a:t>
+            </a:r>
+            <a:r>
+              <a:rPr sz="1250" b="0">
+                <a:solidFill>
+                  <a:srgbClr val="1E2933"/>
+                </a:solidFill>
+                <a:latin typeface="Pretendard"/>
+              </a:rPr>
+              <a:t>원하는 직무에서 커리어 시작</a:t>
+            </a:r>
+          </a:p>
+          <a:p>
+            <a:pPr algn="l">
+              <a:lnSpc>
+                <a:spcPct val="105000"/>
+              </a:lnSpc>
+              <a:spcBef>
+                <a:spcPts val="800"/>
+              </a:spcBef>
+            </a:pPr>
+            <a:r>
+              <a:rPr sz="1250" b="1">
+                <a:solidFill>
+                  <a:srgbClr val="7E9908"/>
+                </a:solidFill>
+                <a:latin typeface="Pretendard"/>
+              </a:rPr>
+              <a:t>▸ </a:t>
+            </a:r>
+            <a:r>
+              <a:rPr sz="1250" b="0">
+                <a:solidFill>
+                  <a:srgbClr val="1E2933"/>
+                </a:solidFill>
+                <a:latin typeface="Pretendard"/>
+              </a:rPr>
+              <a:t>입사 후에도 꾸준히 성장</a:t>
+            </a:r>
+          </a:p>
+        </p:txBody>
+      </p:sp>
+    </p:spTree>
+  </p:cSld>
+  <p:clrMapOvr>
+    <a:masterClrMapping/>
+  </p:clrMapOvr>
+</p:sld>
+</file>
+
+<file path=ppt/slides/slide8.xml><?xml version="1.0" encoding="utf-8"?>
+<p:sld xmlns:a="http://schemas.openxmlformats.org/drawingml/2006/main" xmlns:p="http://schemas.openxmlformats.org/presentationml/2006/main" xmlns:r="http://schemas.openxmlformats.org/officeDocument/2006/relationships">
+  <p:cSld>
+    <p:bg>
+      <p:bgPr>
+        <a:solidFill>
+          <a:srgbClr val="F4F7FB"/>
+        </a:solidFill>
+        <a:effectLst/>
+      </p:bgPr>
+    </p:bg>
+    <p:spTree>
+      <p:nvGrpSpPr>
+        <p:cNvPr id="1" name=""/>
+        <p:cNvGrpSpPr/>
+        <p:nvPr/>
+      </p:nvGrpSpPr>
+      <p:grpSpPr/>
+      <p:sp>
+        <p:nvSpPr>
+          <p:cNvPr id="2" name="Rectangle 1"/>
+          <p:cNvSpPr/>
+          <p:nvPr/>
+        </p:nvSpPr>
+        <p:spPr>
+          <a:xfrm>
+            <a:off x="0" y="0"/>
+            <a:ext cx="12191695" cy="1051560"/>
+          </a:xfrm>
+          <a:prstGeom prst="rect">
+            <a:avLst/>
+          </a:prstGeom>
+          <a:solidFill>
+            <a:srgbClr val="0F2E4F"/>
+          </a:solidFill>
+          <a:ln>
+            <a:noFill/>
+          </a:ln>
+          <a:effectLst/>
+        </p:spPr>
+        <p:style>
+          <a:lnRef idx="1">
+            <a:schemeClr val="accent1"/>
+          </a:lnRef>
+          <a:fillRef idx="3">
+            <a:schemeClr val="accent1"/>
+          </a:fillRef>
+          <a:effectRef idx="2">
+            <a:schemeClr val="accent1"/>
+          </a:effectRef>
+          <a:fontRef idx="minor">
+            <a:schemeClr val="lt1"/>
+          </a:fontRef>
+        </p:style>
+        <p:txBody>
+          <a:bodyPr rtlCol="0" anchor="ctr"/>
+          <a:lstStyle/>
+          <a:p>
+            <a:pPr algn="ctr"/>
+          </a:p>
+        </p:txBody>
+      </p:sp>
+      <p:sp>
+        <p:nvSpPr>
+          <p:cNvPr id="3" name="Rectangle 2"/>
+          <p:cNvSpPr/>
+          <p:nvPr/>
+        </p:nvSpPr>
+        <p:spPr>
+          <a:xfrm>
+            <a:off x="0" y="1051560"/>
+            <a:ext cx="12191695" cy="50800"/>
+          </a:xfrm>
+          <a:prstGeom prst="rect">
+            <a:avLst/>
+          </a:prstGeom>
+          <a:solidFill>
+            <a:srgbClr val="C6F016"/>
+          </a:solidFill>
+          <a:ln>
+            <a:noFill/>
+          </a:ln>
+          <a:effectLst/>
+        </p:spPr>
+        <p:style>
+          <a:lnRef idx="1">
+            <a:schemeClr val="accent1"/>
+          </a:lnRef>
+          <a:fillRef idx="3">
+            <a:schemeClr val="accent1"/>
+          </a:fillRef>
+          <a:effectRef idx="2">
+            <a:schemeClr val="accent1"/>
+          </a:effectRef>
+          <a:fontRef idx="minor">
+            <a:schemeClr val="lt1"/>
+          </a:fontRef>
+        </p:style>
+        <p:txBody>
+          <a:bodyPr rtlCol="0" anchor="ctr"/>
+          <a:lstStyle/>
+          <a:p>
+            <a:pPr algn="ctr"/>
+          </a:p>
+        </p:txBody>
+      </p:sp>
+      <p:sp>
+        <p:nvSpPr>
+          <p:cNvPr id="4" name="TextBox 3"/>
+          <p:cNvSpPr txBox="1"/>
+          <p:nvPr/>
+        </p:nvSpPr>
+        <p:spPr>
+          <a:xfrm>
+            <a:off x="548640" y="164592"/>
+            <a:ext cx="8229600" cy="320040"/>
+          </a:xfrm>
+          <a:prstGeom prst="rect">
+            <a:avLst/>
+          </a:prstGeom>
+          <a:noFill/>
+        </p:spPr>
+        <p:txBody>
+          <a:bodyPr wrap="square" anchor="t" lIns="25400" rIns="25400" tIns="25400" bIns="25400">
+            <a:spAutoFit/>
+          </a:bodyPr>
+          <a:lstStyle/>
+          <a:p>
+            <a:pPr algn="l"/>
+            <a:r>
+              <a:rPr sz="1200" b="1">
+                <a:solidFill>
+                  <a:srgbClr val="C6F016"/>
+                </a:solidFill>
+                <a:latin typeface="Pretendard"/>
+              </a:rPr>
+              <a:t>LINKAGE  ·  활동과 목표의 연결</a:t>
+            </a:r>
+          </a:p>
+        </p:txBody>
+      </p:sp>
+      <p:sp>
+        <p:nvSpPr>
+          <p:cNvPr id="5" name="TextBox 4"/>
+          <p:cNvSpPr txBox="1"/>
+          <p:nvPr/>
+        </p:nvSpPr>
+        <p:spPr>
+          <a:xfrm>
+            <a:off x="548640" y="420624"/>
+            <a:ext cx="9601200" cy="548640"/>
+          </a:xfrm>
+          <a:prstGeom prst="rect">
+            <a:avLst/>
+          </a:prstGeom>
+          <a:noFill/>
+        </p:spPr>
+        <p:txBody>
+          <a:bodyPr wrap="square" anchor="t" lIns="25400" rIns="25400" tIns="25400" bIns="25400">
+            <a:spAutoFit/>
+          </a:bodyPr>
+          <a:lstStyle/>
+          <a:p>
+            <a:pPr algn="l"/>
+            <a:r>
+              <a:rPr sz="2600" b="1">
+                <a:solidFill>
+                  <a:srgbClr val="FFFFFF"/>
+                </a:solidFill>
+                <a:latin typeface="Pretendard"/>
+              </a:rPr>
+              <a:t>활동 - 역량 - 목표</a:t>
+            </a:r>
+          </a:p>
+        </p:txBody>
+      </p:sp>
+      <p:sp>
+        <p:nvSpPr>
+          <p:cNvPr id="6" name="Rounded Rectangle 5"/>
+          <p:cNvSpPr/>
+          <p:nvPr/>
+        </p:nvSpPr>
+        <p:spPr>
+          <a:xfrm>
+            <a:off x="11277295" y="301752"/>
+            <a:ext cx="457200" cy="457200"/>
+          </a:xfrm>
+          <a:prstGeom prst="roundRect">
+            <a:avLst/>
+          </a:prstGeom>
+          <a:solidFill>
+            <a:srgbClr val="C6F016"/>
+          </a:solidFill>
+          <a:ln>
+            <a:noFill/>
+          </a:ln>
+          <a:effectLst/>
+        </p:spPr>
+        <p:style>
+          <a:lnRef idx="1">
+            <a:schemeClr val="accent1"/>
+          </a:lnRef>
+          <a:fillRef idx="3">
+            <a:schemeClr val="accent1"/>
+          </a:fillRef>
+          <a:effectRef idx="2">
+            <a:schemeClr val="accent1"/>
+          </a:effectRef>
+          <a:fontRef idx="minor">
+            <a:schemeClr val="lt1"/>
+          </a:fontRef>
+        </p:style>
+        <p:txBody>
+          <a:bodyPr rtlCol="0" anchor="ctr" wrap="square"/>
+          <a:lstStyle/>
+          <a:p>
+            <a:pPr algn="ctr"/>
+            <a:r>
+              <a:rPr sz="1600" b="1">
+                <a:solidFill>
+                  <a:srgbClr val="0F2E4F"/>
+                </a:solidFill>
+                <a:latin typeface="Pretendard"/>
+              </a:rPr>
+              <a:t>08</a:t>
             </a:r>
           </a:p>
         </p:txBody>
@@ -11028,7 +11995,7 @@
                 </a:solidFill>
                 <a:latin typeface="Pretendard"/>
               </a:rPr>
-              <a:t>10개월 멘토링 완주</a:t>
+              <a:t>장기 멘토링 완주</a:t>
             </a:r>
           </a:p>
         </p:txBody>
@@ -11316,7 +12283,7 @@
 </p:sld>
 </file>
 
-<file path=ppt/slides/slide8.xml><?xml version="1.0" encoding="utf-8"?>
+<file path=ppt/slides/slide9.xml><?xml version="1.0" encoding="utf-8"?>
 <p:sld xmlns:a="http://schemas.openxmlformats.org/drawingml/2006/main" xmlns:p="http://schemas.openxmlformats.org/presentationml/2006/main" xmlns:r="http://schemas.openxmlformats.org/officeDocument/2006/relationships">
   <p:cSld>
     <p:bg>
